--- a/Bete_Project_Defense.pptx
+++ b/Bete_Project_Defense.pptx
@@ -4,28 +4,31 @@
   <p:sldMasterIdLst>
     <p:sldMasterId id="2147483648" r:id="rId1"/>
   </p:sldMasterIdLst>
+  <p:notesMasterIdLst>
+    <p:notesMasterId r:id="rId21"/>
+  </p:notesMasterIdLst>
   <p:sldIdLst>
-    <p:sldId id="256" r:id="rId7"/>
-    <p:sldId id="257" r:id="rId9"/>
-    <p:sldId id="258" r:id="rId10"/>
-    <p:sldId id="259" r:id="rId11"/>
-    <p:sldId id="260" r:id="rId12"/>
-    <p:sldId id="261" r:id="rId13"/>
-    <p:sldId id="262" r:id="rId14"/>
-    <p:sldId id="263" r:id="rId15"/>
-    <p:sldId id="264" r:id="rId16"/>
-    <p:sldId id="265" r:id="rId17"/>
-    <p:sldId id="266" r:id="rId18"/>
-    <p:sldId id="267" r:id="rId19"/>
-    <p:sldId id="268" r:id="rId20"/>
-    <p:sldId id="269" r:id="rId21"/>
-    <p:sldId id="270" r:id="rId22"/>
-    <p:sldId id="271" r:id="rId23"/>
-    <p:sldId id="272" r:id="rId24"/>
-    <p:sldId id="273" r:id="rId25"/>
-    <p:sldId id="274" r:id="rId26"/>
+    <p:sldId id="256" r:id="rId2"/>
+    <p:sldId id="257" r:id="rId3"/>
+    <p:sldId id="258" r:id="rId4"/>
+    <p:sldId id="259" r:id="rId5"/>
+    <p:sldId id="260" r:id="rId6"/>
+    <p:sldId id="261" r:id="rId7"/>
+    <p:sldId id="262" r:id="rId8"/>
+    <p:sldId id="263" r:id="rId9"/>
+    <p:sldId id="264" r:id="rId10"/>
+    <p:sldId id="265" r:id="rId11"/>
+    <p:sldId id="266" r:id="rId12"/>
+    <p:sldId id="267" r:id="rId13"/>
+    <p:sldId id="268" r:id="rId14"/>
+    <p:sldId id="269" r:id="rId15"/>
+    <p:sldId id="270" r:id="rId16"/>
+    <p:sldId id="271" r:id="rId17"/>
+    <p:sldId id="272" r:id="rId18"/>
+    <p:sldId id="273" r:id="rId19"/>
+    <p:sldId id="274" r:id="rId20"/>
   </p:sldIdLst>
-  <p:sldSz cx="12191695" cy="6858000" type="screen4x3"/>
+  <p:sldSz cx="12192000" cy="6858000"/>
   <p:notesSz cx="6858000" cy="9144000"/>
   <p:defaultTextStyle>
     <a:defPPr>
@@ -122,11 +125,27 @@
       </a:defRPr>
     </a:lvl9pPr>
   </p:defaultTextStyle>
+  <p:extLst>
+    <p:ext uri="{EFAFB233-063F-42B5-8137-9DF3F51BA10A}">
+      <p15:sldGuideLst xmlns:p15="http://schemas.microsoft.com/office/powerpoint/2012/main">
+        <p15:guide id="1" orient="horz" pos="2160">
+          <p15:clr>
+            <a:srgbClr val="A4A3A4"/>
+          </p15:clr>
+        </p15:guide>
+        <p15:guide id="2" pos="2880">
+          <p15:clr>
+            <a:srgbClr val="A4A3A4"/>
+          </p15:clr>
+        </p15:guide>
+      </p15:sldGuideLst>
+    </p:ext>
+  </p:extLst>
 </p:presentation>
 </file>
 
 <file path=ppt/notesMasters/notesMaster1.xml><?xml version="1.0" encoding="utf-8"?>
-<p:notesMaster xmlns:a="http://schemas.openxmlformats.org/drawingml/2006/main" xmlns:p="http://schemas.openxmlformats.org/presentationml/2006/main" xmlns:r="http://schemas.openxmlformats.org/officeDocument/2006/relationships">
+<p:notesMaster xmlns:a="http://schemas.openxmlformats.org/drawingml/2006/main" xmlns:r="http://schemas.openxmlformats.org/officeDocument/2006/relationships" xmlns:p="http://schemas.openxmlformats.org/presentationml/2006/main">
   <p:cSld>
     <p:bg>
       <p:bgRef idx="1001">
@@ -147,241 +166,16 @@
           <a:chExt cx="0" cy="0"/>
         </a:xfrm>
       </p:grpSpPr>
-      <p:sp>
-        <p:nvSpPr>
-          <p:cNvPr id="2" name="Header Placeholder 1"/>
-          <p:cNvSpPr>
-            <a:spLocks noGrp="1"/>
-          </p:cNvSpPr>
-          <p:nvPr>
-            <p:ph type="hdr" sz="quarter"/>
-          </p:nvPr>
-        </p:nvSpPr>
-        <p:spPr>
-          <a:xfrm>
-            <a:off x="0" y="0"/>
-            <a:ext cx="2971800" cy="457200"/>
-          </a:xfrm>
-          <a:prstGeom prst="rect">
-            <a:avLst/>
-          </a:prstGeom>
-        </p:spPr>
-        <p:txBody>
-          <a:bodyPr vert="horz" lIns="91440" tIns="45720" rIns="91440" bIns="45720" rtlCol="0"/>
-          <a:lstStyle>
-            <a:lvl1pPr algn="l">
-              <a:defRPr sz="1200"/>
-            </a:lvl1pPr>
-          </a:lstStyle>
-          <a:p>
-            <a:endParaRPr lang="en-US"/>
-          </a:p>
-        </p:txBody>
-      </p:sp>
-      <p:sp>
-        <p:nvSpPr>
-          <p:cNvPr id="3" name="Date Placeholder 2"/>
-          <p:cNvSpPr>
-            <a:spLocks noGrp="1"/>
-          </p:cNvSpPr>
-          <p:nvPr>
-            <p:ph type="dt" idx="1"/>
-          </p:nvPr>
-        </p:nvSpPr>
-        <p:spPr>
-          <a:xfrm>
-            <a:off x="3884613" y="0"/>
-            <a:ext cx="2971800" cy="457200"/>
-          </a:xfrm>
-          <a:prstGeom prst="rect">
-            <a:avLst/>
-          </a:prstGeom>
-        </p:spPr>
-        <p:txBody>
-          <a:bodyPr vert="horz" lIns="91440" tIns="45720" rIns="91440" bIns="45720" rtlCol="0"/>
-          <a:lstStyle>
-            <a:lvl1pPr algn="r">
-              <a:defRPr sz="1200"/>
-            </a:lvl1pPr>
-          </a:lstStyle>
-          <a:p>
-            <a:fld id="{0F89C1C7-3DCD-1040-A9CF-14679D8B5DDD}" type="datetimeFigureOut">
-              <a:rPr lang="en-US" smtClean="0"/>
-              <a:t>10/17/16</a:t>
-            </a:fld>
-            <a:endParaRPr lang="en-US"/>
-          </a:p>
-        </p:txBody>
-      </p:sp>
-      <p:sp>
-        <p:nvSpPr>
-          <p:cNvPr id="4" name="Slide Image Placeholder 3"/>
-          <p:cNvSpPr>
-            <a:spLocks noGrp="1" noRot="1" noChangeAspect="1"/>
-          </p:cNvSpPr>
-          <p:nvPr>
-            <p:ph type="sldImg" idx="2"/>
-          </p:nvPr>
-        </p:nvSpPr>
-        <p:spPr>
-          <a:xfrm>
-            <a:off x="1143000" y="685800"/>
-            <a:ext cx="4572000" cy="3429000"/>
-          </a:xfrm>
-          <a:prstGeom prst="rect">
-            <a:avLst/>
-          </a:prstGeom>
-          <a:noFill/>
-          <a:ln w="12700">
-            <a:solidFill>
-              <a:prstClr val="black"/>
-            </a:solidFill>
-          </a:ln>
-        </p:spPr>
-        <p:txBody>
-          <a:bodyPr vert="horz" lIns="91440" tIns="45720" rIns="91440" bIns="45720" rtlCol="0" anchor="ctr"/>
-          <a:lstStyle/>
-          <a:p>
-            <a:endParaRPr lang="en-US"/>
-          </a:p>
-        </p:txBody>
-      </p:sp>
-      <p:sp>
-        <p:nvSpPr>
-          <p:cNvPr id="5" name="Notes Placeholder 4"/>
-          <p:cNvSpPr>
-            <a:spLocks noGrp="1"/>
-          </p:cNvSpPr>
-          <p:nvPr>
-            <p:ph type="body" sz="quarter" idx="3"/>
-          </p:nvPr>
-        </p:nvSpPr>
-        <p:spPr>
-          <a:xfrm>
-            <a:off x="685800" y="4343400"/>
-            <a:ext cx="5486400" cy="4114800"/>
-          </a:xfrm>
-          <a:prstGeom prst="rect">
-            <a:avLst/>
-          </a:prstGeom>
-        </p:spPr>
-        <p:txBody>
-          <a:bodyPr vert="horz" lIns="91440" tIns="45720" rIns="91440" bIns="45720" rtlCol="0"/>
-          <a:lstStyle/>
-          <a:p>
-            <a:pPr lvl="0"/>
-            <a:r>
-              <a:rPr lang="en-US" smtClean="0"/>
-              <a:t>Click to edit Master text styles</a:t>
-            </a:r>
-          </a:p>
-          <a:p>
-            <a:pPr lvl="1"/>
-            <a:r>
-              <a:rPr lang="en-US" smtClean="0"/>
-              <a:t>Second level</a:t>
-            </a:r>
-          </a:p>
-          <a:p>
-            <a:pPr lvl="2"/>
-            <a:r>
-              <a:rPr lang="en-US" smtClean="0"/>
-              <a:t>Third level</a:t>
-            </a:r>
-          </a:p>
-          <a:p>
-            <a:pPr lvl="3"/>
-            <a:r>
-              <a:rPr lang="en-US" smtClean="0"/>
-              <a:t>Fourth level</a:t>
-            </a:r>
-          </a:p>
-          <a:p>
-            <a:pPr lvl="4"/>
-            <a:r>
-              <a:rPr lang="en-US" smtClean="0"/>
-              <a:t>Fifth level</a:t>
-            </a:r>
-            <a:endParaRPr lang="en-US"/>
-          </a:p>
-        </p:txBody>
-      </p:sp>
-      <p:sp>
-        <p:nvSpPr>
-          <p:cNvPr id="6" name="Footer Placeholder 5"/>
-          <p:cNvSpPr>
-            <a:spLocks noGrp="1"/>
-          </p:cNvSpPr>
-          <p:nvPr>
-            <p:ph type="ftr" sz="quarter" idx="4"/>
-          </p:nvPr>
-        </p:nvSpPr>
-        <p:spPr>
-          <a:xfrm>
-            <a:off x="0" y="8685213"/>
-            <a:ext cx="2971800" cy="457200"/>
-          </a:xfrm>
-          <a:prstGeom prst="rect">
-            <a:avLst/>
-          </a:prstGeom>
-        </p:spPr>
-        <p:txBody>
-          <a:bodyPr vert="horz" lIns="91440" tIns="45720" rIns="91440" bIns="45720" rtlCol="0" anchor="b"/>
-          <a:lstStyle>
-            <a:lvl1pPr algn="l">
-              <a:defRPr sz="1200"/>
-            </a:lvl1pPr>
-          </a:lstStyle>
-          <a:p>
-            <a:endParaRPr lang="en-US"/>
-          </a:p>
-        </p:txBody>
-      </p:sp>
-      <p:sp>
-        <p:nvSpPr>
-          <p:cNvPr id="7" name="Slide Number Placeholder 6"/>
-          <p:cNvSpPr>
-            <a:spLocks noGrp="1"/>
-          </p:cNvSpPr>
-          <p:nvPr>
-            <p:ph type="sldNum" sz="quarter" idx="5"/>
-          </p:nvPr>
-        </p:nvSpPr>
-        <p:spPr>
-          <a:xfrm>
-            <a:off x="3884613" y="8685213"/>
-            <a:ext cx="2971800" cy="457200"/>
-          </a:xfrm>
-          <a:prstGeom prst="rect">
-            <a:avLst/>
-          </a:prstGeom>
-        </p:spPr>
-        <p:txBody>
-          <a:bodyPr vert="horz" lIns="91440" tIns="45720" rIns="91440" bIns="45720" rtlCol="0" anchor="b"/>
-          <a:lstStyle>
-            <a:lvl1pPr algn="r">
-              <a:defRPr sz="1200"/>
-            </a:lvl1pPr>
-          </a:lstStyle>
-          <a:p>
-            <a:fld id="{BB5E49A5-4136-284D-997B-48E1D791AD67}" type="slidenum">
-              <a:rPr lang="en-US" smtClean="0"/>
-              <a:t>‹#›</a:t>
-            </a:fld>
-            <a:endParaRPr lang="en-US"/>
-          </a:p>
-        </p:txBody>
-      </p:sp>
     </p:spTree>
     <p:extLst>
       <p:ext uri="{BB962C8B-B14F-4D97-AF65-F5344CB8AC3E}">
-        <p14:creationId xmlns:p14="http://schemas.microsoft.com/office/powerpoint/2010/main" val="2623252185"/>
+        <p14:creationId xmlns:p14="http://schemas.microsoft.com/office/powerpoint/2010/main" val="3685079833"/>
       </p:ext>
     </p:extLst>
   </p:cSld>
   <p:clrMap bg1="lt1" tx1="dk1" bg2="lt2" tx2="dk2" accent1="accent1" accent2="accent2" accent3="accent3" accent4="accent4" accent5="accent5" accent6="accent6" hlink="hlink" folHlink="folHlink"/>
   <p:notesStyle>
-    <a:lvl1pPr marL="0" algn="l" defTabSz="457200" rtl="0" eaLnBrk="1" latinLnBrk="0" hangingPunct="1">
+    <a:lvl1pPr marL="0" algn="l" defTabSz="914400" rtl="0" eaLnBrk="1" latinLnBrk="0" hangingPunct="1">
       <a:defRPr sz="1200" kern="1200">
         <a:solidFill>
           <a:schemeClr val="tx1"/>
@@ -391,7 +185,7 @@
         <a:cs typeface="+mn-cs"/>
       </a:defRPr>
     </a:lvl1pPr>
-    <a:lvl2pPr marL="457200" algn="l" defTabSz="457200" rtl="0" eaLnBrk="1" latinLnBrk="0" hangingPunct="1">
+    <a:lvl2pPr marL="457200" algn="l" defTabSz="914400" rtl="0" eaLnBrk="1" latinLnBrk="0" hangingPunct="1">
       <a:defRPr sz="1200" kern="1200">
         <a:solidFill>
           <a:schemeClr val="tx1"/>
@@ -401,7 +195,7 @@
         <a:cs typeface="+mn-cs"/>
       </a:defRPr>
     </a:lvl2pPr>
-    <a:lvl3pPr marL="914400" algn="l" defTabSz="457200" rtl="0" eaLnBrk="1" latinLnBrk="0" hangingPunct="1">
+    <a:lvl3pPr marL="914400" algn="l" defTabSz="914400" rtl="0" eaLnBrk="1" latinLnBrk="0" hangingPunct="1">
       <a:defRPr sz="1200" kern="1200">
         <a:solidFill>
           <a:schemeClr val="tx1"/>
@@ -411,7 +205,7 @@
         <a:cs typeface="+mn-cs"/>
       </a:defRPr>
     </a:lvl3pPr>
-    <a:lvl4pPr marL="1371600" algn="l" defTabSz="457200" rtl="0" eaLnBrk="1" latinLnBrk="0" hangingPunct="1">
+    <a:lvl4pPr marL="1371600" algn="l" defTabSz="914400" rtl="0" eaLnBrk="1" latinLnBrk="0" hangingPunct="1">
       <a:defRPr sz="1200" kern="1200">
         <a:solidFill>
           <a:schemeClr val="tx1"/>
@@ -421,7 +215,7 @@
         <a:cs typeface="+mn-cs"/>
       </a:defRPr>
     </a:lvl4pPr>
-    <a:lvl5pPr marL="1828800" algn="l" defTabSz="457200" rtl="0" eaLnBrk="1" latinLnBrk="0" hangingPunct="1">
+    <a:lvl5pPr marL="1828800" algn="l" defTabSz="914400" rtl="0" eaLnBrk="1" latinLnBrk="0" hangingPunct="1">
       <a:defRPr sz="1200" kern="1200">
         <a:solidFill>
           <a:schemeClr val="tx1"/>
@@ -431,7 +225,7 @@
         <a:cs typeface="+mn-cs"/>
       </a:defRPr>
     </a:lvl5pPr>
-    <a:lvl6pPr marL="2286000" algn="l" defTabSz="457200" rtl="0" eaLnBrk="1" latinLnBrk="0" hangingPunct="1">
+    <a:lvl6pPr marL="2286000" algn="l" defTabSz="914400" rtl="0" eaLnBrk="1" latinLnBrk="0" hangingPunct="1">
       <a:defRPr sz="1200" kern="1200">
         <a:solidFill>
           <a:schemeClr val="tx1"/>
@@ -441,7 +235,7 @@
         <a:cs typeface="+mn-cs"/>
       </a:defRPr>
     </a:lvl6pPr>
-    <a:lvl7pPr marL="2743200" algn="l" defTabSz="457200" rtl="0" eaLnBrk="1" latinLnBrk="0" hangingPunct="1">
+    <a:lvl7pPr marL="2743200" algn="l" defTabSz="914400" rtl="0" eaLnBrk="1" latinLnBrk="0" hangingPunct="1">
       <a:defRPr sz="1200" kern="1200">
         <a:solidFill>
           <a:schemeClr val="tx1"/>
@@ -451,7 +245,7 @@
         <a:cs typeface="+mn-cs"/>
       </a:defRPr>
     </a:lvl7pPr>
-    <a:lvl8pPr marL="3200400" algn="l" defTabSz="457200" rtl="0" eaLnBrk="1" latinLnBrk="0" hangingPunct="1">
+    <a:lvl8pPr marL="3200400" algn="l" defTabSz="914400" rtl="0" eaLnBrk="1" latinLnBrk="0" hangingPunct="1">
       <a:defRPr sz="1200" kern="1200">
         <a:solidFill>
           <a:schemeClr val="tx1"/>
@@ -461,7 +255,7 @@
         <a:cs typeface="+mn-cs"/>
       </a:defRPr>
     </a:lvl8pPr>
-    <a:lvl9pPr marL="3657600" algn="l" defTabSz="457200" rtl="0" eaLnBrk="1" latinLnBrk="0" hangingPunct="1">
+    <a:lvl9pPr marL="3657600" algn="l" defTabSz="914400" rtl="0" eaLnBrk="1" latinLnBrk="0" hangingPunct="1">
       <a:defRPr sz="1200" kern="1200">
         <a:solidFill>
           <a:schemeClr val="tx1"/>
@@ -476,7 +270,7 @@
 </file>
 
 <file path=ppt/notesSlides/notesSlide1.xml><?xml version="1.0" encoding="utf-8"?>
-<p:notes xmlns:a="http://schemas.openxmlformats.org/drawingml/2006/main" xmlns:p="http://schemas.openxmlformats.org/presentationml/2006/main" xmlns:r="http://schemas.openxmlformats.org/officeDocument/2006/relationships">
+<p:notes xmlns:a="http://schemas.openxmlformats.org/drawingml/2006/main" xmlns:r="http://schemas.openxmlformats.org/officeDocument/2006/relationships" xmlns:p="http://schemas.openxmlformats.org/presentationml/2006/main">
   <p:cSld>
     <p:spTree>
       <p:nvGrpSpPr>
@@ -496,7 +290,7 @@
         <p:nvSpPr>
           <p:cNvPr id="2" name="Slide Image Placeholder 1"/>
           <p:cNvSpPr>
-            <a:spLocks noGrp="1"/>
+            <a:spLocks noGrp="1" noRot="1" noChangeAspect="1"/>
           </p:cNvSpPr>
           <p:nvPr>
             <p:ph type="sldImg" idx="2"/>
@@ -511,7 +305,7 @@
             <a:spLocks noGrp="1"/>
           </p:cNvSpPr>
           <p:nvPr>
-            <p:ph type="body" idx="3" sz="quarter"/>
+            <p:ph type="body" sz="quarter" idx="3"/>
           </p:nvPr>
         </p:nvSpPr>
         <p:spPr/>
@@ -532,7 +326,7 @@
             <a:spLocks noGrp="1"/>
           </p:cNvSpPr>
           <p:nvPr>
-            <p:ph type="sldNum" idx="5" sz="quarter"/>
+            <p:ph type="sldNum" sz="quarter" idx="5"/>
           </p:nvPr>
         </p:nvSpPr>
         <p:spPr/>
@@ -546,7 +340,7 @@
 </file>
 
 <file path=ppt/notesSlides/notesSlide10.xml><?xml version="1.0" encoding="utf-8"?>
-<p:notes xmlns:a="http://schemas.openxmlformats.org/drawingml/2006/main" xmlns:p="http://schemas.openxmlformats.org/presentationml/2006/main" xmlns:r="http://schemas.openxmlformats.org/officeDocument/2006/relationships">
+<p:notes xmlns:a="http://schemas.openxmlformats.org/drawingml/2006/main" xmlns:r="http://schemas.openxmlformats.org/officeDocument/2006/relationships" xmlns:p="http://schemas.openxmlformats.org/presentationml/2006/main">
   <p:cSld>
     <p:spTree>
       <p:nvGrpSpPr>
@@ -566,7 +360,7 @@
         <p:nvSpPr>
           <p:cNvPr id="2" name="Slide Image Placeholder 1"/>
           <p:cNvSpPr>
-            <a:spLocks noGrp="1"/>
+            <a:spLocks noGrp="1" noRot="1" noChangeAspect="1"/>
           </p:cNvSpPr>
           <p:nvPr>
             <p:ph type="sldImg" idx="2"/>
@@ -581,7 +375,7 @@
             <a:spLocks noGrp="1"/>
           </p:cNvSpPr>
           <p:nvPr>
-            <p:ph type="body" idx="3" sz="quarter"/>
+            <p:ph type="body" sz="quarter" idx="3"/>
           </p:nvPr>
         </p:nvSpPr>
         <p:spPr/>
@@ -602,7 +396,7 @@
             <a:spLocks noGrp="1"/>
           </p:cNvSpPr>
           <p:nvPr>
-            <p:ph type="sldNum" idx="5" sz="quarter"/>
+            <p:ph type="sldNum" sz="quarter" idx="5"/>
           </p:nvPr>
         </p:nvSpPr>
         <p:spPr/>
@@ -616,7 +410,7 @@
 </file>
 
 <file path=ppt/notesSlides/notesSlide11.xml><?xml version="1.0" encoding="utf-8"?>
-<p:notes xmlns:a="http://schemas.openxmlformats.org/drawingml/2006/main" xmlns:p="http://schemas.openxmlformats.org/presentationml/2006/main" xmlns:r="http://schemas.openxmlformats.org/officeDocument/2006/relationships">
+<p:notes xmlns:a="http://schemas.openxmlformats.org/drawingml/2006/main" xmlns:r="http://schemas.openxmlformats.org/officeDocument/2006/relationships" xmlns:p="http://schemas.openxmlformats.org/presentationml/2006/main">
   <p:cSld>
     <p:spTree>
       <p:nvGrpSpPr>
@@ -636,7 +430,7 @@
         <p:nvSpPr>
           <p:cNvPr id="2" name="Slide Image Placeholder 1"/>
           <p:cNvSpPr>
-            <a:spLocks noGrp="1"/>
+            <a:spLocks noGrp="1" noRot="1" noChangeAspect="1"/>
           </p:cNvSpPr>
           <p:nvPr>
             <p:ph type="sldImg" idx="2"/>
@@ -651,7 +445,7 @@
             <a:spLocks noGrp="1"/>
           </p:cNvSpPr>
           <p:nvPr>
-            <p:ph type="body" idx="3" sz="quarter"/>
+            <p:ph type="body" sz="quarter" idx="3"/>
           </p:nvPr>
         </p:nvSpPr>
         <p:spPr/>
@@ -672,7 +466,7 @@
             <a:spLocks noGrp="1"/>
           </p:cNvSpPr>
           <p:nvPr>
-            <p:ph type="sldNum" idx="5" sz="quarter"/>
+            <p:ph type="sldNum" sz="quarter" idx="5"/>
           </p:nvPr>
         </p:nvSpPr>
         <p:spPr/>
@@ -686,7 +480,7 @@
 </file>
 
 <file path=ppt/notesSlides/notesSlide12.xml><?xml version="1.0" encoding="utf-8"?>
-<p:notes xmlns:a="http://schemas.openxmlformats.org/drawingml/2006/main" xmlns:p="http://schemas.openxmlformats.org/presentationml/2006/main" xmlns:r="http://schemas.openxmlformats.org/officeDocument/2006/relationships">
+<p:notes xmlns:a="http://schemas.openxmlformats.org/drawingml/2006/main" xmlns:r="http://schemas.openxmlformats.org/officeDocument/2006/relationships" xmlns:p="http://schemas.openxmlformats.org/presentationml/2006/main">
   <p:cSld>
     <p:spTree>
       <p:nvGrpSpPr>
@@ -706,7 +500,7 @@
         <p:nvSpPr>
           <p:cNvPr id="2" name="Slide Image Placeholder 1"/>
           <p:cNvSpPr>
-            <a:spLocks noGrp="1"/>
+            <a:spLocks noGrp="1" noRot="1" noChangeAspect="1"/>
           </p:cNvSpPr>
           <p:nvPr>
             <p:ph type="sldImg" idx="2"/>
@@ -721,7 +515,7 @@
             <a:spLocks noGrp="1"/>
           </p:cNvSpPr>
           <p:nvPr>
-            <p:ph type="body" idx="3" sz="quarter"/>
+            <p:ph type="body" sz="quarter" idx="3"/>
           </p:nvPr>
         </p:nvSpPr>
         <p:spPr/>
@@ -742,7 +536,7 @@
             <a:spLocks noGrp="1"/>
           </p:cNvSpPr>
           <p:nvPr>
-            <p:ph type="sldNum" idx="5" sz="quarter"/>
+            <p:ph type="sldNum" sz="quarter" idx="5"/>
           </p:nvPr>
         </p:nvSpPr>
         <p:spPr/>
@@ -756,7 +550,7 @@
 </file>
 
 <file path=ppt/notesSlides/notesSlide13.xml><?xml version="1.0" encoding="utf-8"?>
-<p:notes xmlns:a="http://schemas.openxmlformats.org/drawingml/2006/main" xmlns:p="http://schemas.openxmlformats.org/presentationml/2006/main" xmlns:r="http://schemas.openxmlformats.org/officeDocument/2006/relationships">
+<p:notes xmlns:a="http://schemas.openxmlformats.org/drawingml/2006/main" xmlns:r="http://schemas.openxmlformats.org/officeDocument/2006/relationships" xmlns:p="http://schemas.openxmlformats.org/presentationml/2006/main">
   <p:cSld>
     <p:spTree>
       <p:nvGrpSpPr>
@@ -776,7 +570,7 @@
         <p:nvSpPr>
           <p:cNvPr id="2" name="Slide Image Placeholder 1"/>
           <p:cNvSpPr>
-            <a:spLocks noGrp="1"/>
+            <a:spLocks noGrp="1" noRot="1" noChangeAspect="1"/>
           </p:cNvSpPr>
           <p:nvPr>
             <p:ph type="sldImg" idx="2"/>
@@ -791,7 +585,7 @@
             <a:spLocks noGrp="1"/>
           </p:cNvSpPr>
           <p:nvPr>
-            <p:ph type="body" idx="3" sz="quarter"/>
+            <p:ph type="body" sz="quarter" idx="3"/>
           </p:nvPr>
         </p:nvSpPr>
         <p:spPr/>
@@ -812,7 +606,7 @@
             <a:spLocks noGrp="1"/>
           </p:cNvSpPr>
           <p:nvPr>
-            <p:ph type="sldNum" idx="5" sz="quarter"/>
+            <p:ph type="sldNum" sz="quarter" idx="5"/>
           </p:nvPr>
         </p:nvSpPr>
         <p:spPr/>
@@ -826,7 +620,7 @@
 </file>
 
 <file path=ppt/notesSlides/notesSlide14.xml><?xml version="1.0" encoding="utf-8"?>
-<p:notes xmlns:a="http://schemas.openxmlformats.org/drawingml/2006/main" xmlns:p="http://schemas.openxmlformats.org/presentationml/2006/main" xmlns:r="http://schemas.openxmlformats.org/officeDocument/2006/relationships">
+<p:notes xmlns:a="http://schemas.openxmlformats.org/drawingml/2006/main" xmlns:r="http://schemas.openxmlformats.org/officeDocument/2006/relationships" xmlns:p="http://schemas.openxmlformats.org/presentationml/2006/main">
   <p:cSld>
     <p:spTree>
       <p:nvGrpSpPr>
@@ -846,7 +640,7 @@
         <p:nvSpPr>
           <p:cNvPr id="2" name="Slide Image Placeholder 1"/>
           <p:cNvSpPr>
-            <a:spLocks noGrp="1"/>
+            <a:spLocks noGrp="1" noRot="1" noChangeAspect="1"/>
           </p:cNvSpPr>
           <p:nvPr>
             <p:ph type="sldImg" idx="2"/>
@@ -861,7 +655,7 @@
             <a:spLocks noGrp="1"/>
           </p:cNvSpPr>
           <p:nvPr>
-            <p:ph type="body" idx="3" sz="quarter"/>
+            <p:ph type="body" sz="quarter" idx="3"/>
           </p:nvPr>
         </p:nvSpPr>
         <p:spPr/>
@@ -882,7 +676,7 @@
             <a:spLocks noGrp="1"/>
           </p:cNvSpPr>
           <p:nvPr>
-            <p:ph type="sldNum" idx="5" sz="quarter"/>
+            <p:ph type="sldNum" sz="quarter" idx="5"/>
           </p:nvPr>
         </p:nvSpPr>
         <p:spPr/>
@@ -896,7 +690,7 @@
 </file>
 
 <file path=ppt/notesSlides/notesSlide15.xml><?xml version="1.0" encoding="utf-8"?>
-<p:notes xmlns:a="http://schemas.openxmlformats.org/drawingml/2006/main" xmlns:p="http://schemas.openxmlformats.org/presentationml/2006/main" xmlns:r="http://schemas.openxmlformats.org/officeDocument/2006/relationships">
+<p:notes xmlns:a="http://schemas.openxmlformats.org/drawingml/2006/main" xmlns:r="http://schemas.openxmlformats.org/officeDocument/2006/relationships" xmlns:p="http://schemas.openxmlformats.org/presentationml/2006/main">
   <p:cSld>
     <p:spTree>
       <p:nvGrpSpPr>
@@ -916,7 +710,7 @@
         <p:nvSpPr>
           <p:cNvPr id="2" name="Slide Image Placeholder 1"/>
           <p:cNvSpPr>
-            <a:spLocks noGrp="1"/>
+            <a:spLocks noGrp="1" noRot="1" noChangeAspect="1"/>
           </p:cNvSpPr>
           <p:nvPr>
             <p:ph type="sldImg" idx="2"/>
@@ -931,7 +725,7 @@
             <a:spLocks noGrp="1"/>
           </p:cNvSpPr>
           <p:nvPr>
-            <p:ph type="body" idx="3" sz="quarter"/>
+            <p:ph type="body" sz="quarter" idx="3"/>
           </p:nvPr>
         </p:nvSpPr>
         <p:spPr/>
@@ -952,7 +746,7 @@
             <a:spLocks noGrp="1"/>
           </p:cNvSpPr>
           <p:nvPr>
-            <p:ph type="sldNum" idx="5" sz="quarter"/>
+            <p:ph type="sldNum" sz="quarter" idx="5"/>
           </p:nvPr>
         </p:nvSpPr>
         <p:spPr/>
@@ -966,7 +760,7 @@
 </file>
 
 <file path=ppt/notesSlides/notesSlide16.xml><?xml version="1.0" encoding="utf-8"?>
-<p:notes xmlns:a="http://schemas.openxmlformats.org/drawingml/2006/main" xmlns:p="http://schemas.openxmlformats.org/presentationml/2006/main" xmlns:r="http://schemas.openxmlformats.org/officeDocument/2006/relationships">
+<p:notes xmlns:a="http://schemas.openxmlformats.org/drawingml/2006/main" xmlns:r="http://schemas.openxmlformats.org/officeDocument/2006/relationships" xmlns:p="http://schemas.openxmlformats.org/presentationml/2006/main">
   <p:cSld>
     <p:spTree>
       <p:nvGrpSpPr>
@@ -986,7 +780,7 @@
         <p:nvSpPr>
           <p:cNvPr id="2" name="Slide Image Placeholder 1"/>
           <p:cNvSpPr>
-            <a:spLocks noGrp="1"/>
+            <a:spLocks noGrp="1" noRot="1" noChangeAspect="1"/>
           </p:cNvSpPr>
           <p:nvPr>
             <p:ph type="sldImg" idx="2"/>
@@ -1001,7 +795,7 @@
             <a:spLocks noGrp="1"/>
           </p:cNvSpPr>
           <p:nvPr>
-            <p:ph type="body" idx="3" sz="quarter"/>
+            <p:ph type="body" sz="quarter" idx="3"/>
           </p:nvPr>
         </p:nvSpPr>
         <p:spPr/>
@@ -1022,7 +816,7 @@
             <a:spLocks noGrp="1"/>
           </p:cNvSpPr>
           <p:nvPr>
-            <p:ph type="sldNum" idx="5" sz="quarter"/>
+            <p:ph type="sldNum" sz="quarter" idx="5"/>
           </p:nvPr>
         </p:nvSpPr>
         <p:spPr/>
@@ -1036,7 +830,7 @@
 </file>
 
 <file path=ppt/notesSlides/notesSlide17.xml><?xml version="1.0" encoding="utf-8"?>
-<p:notes xmlns:a="http://schemas.openxmlformats.org/drawingml/2006/main" xmlns:p="http://schemas.openxmlformats.org/presentationml/2006/main" xmlns:r="http://schemas.openxmlformats.org/officeDocument/2006/relationships">
+<p:notes xmlns:a="http://schemas.openxmlformats.org/drawingml/2006/main" xmlns:r="http://schemas.openxmlformats.org/officeDocument/2006/relationships" xmlns:p="http://schemas.openxmlformats.org/presentationml/2006/main">
   <p:cSld>
     <p:spTree>
       <p:nvGrpSpPr>
@@ -1056,7 +850,7 @@
         <p:nvSpPr>
           <p:cNvPr id="2" name="Slide Image Placeholder 1"/>
           <p:cNvSpPr>
-            <a:spLocks noGrp="1"/>
+            <a:spLocks noGrp="1" noRot="1" noChangeAspect="1"/>
           </p:cNvSpPr>
           <p:nvPr>
             <p:ph type="sldImg" idx="2"/>
@@ -1071,7 +865,7 @@
             <a:spLocks noGrp="1"/>
           </p:cNvSpPr>
           <p:nvPr>
-            <p:ph type="body" idx="3" sz="quarter"/>
+            <p:ph type="body" sz="quarter" idx="3"/>
           </p:nvPr>
         </p:nvSpPr>
         <p:spPr/>
@@ -1092,7 +886,7 @@
             <a:spLocks noGrp="1"/>
           </p:cNvSpPr>
           <p:nvPr>
-            <p:ph type="sldNum" idx="5" sz="quarter"/>
+            <p:ph type="sldNum" sz="quarter" idx="5"/>
           </p:nvPr>
         </p:nvSpPr>
         <p:spPr/>
@@ -1106,7 +900,7 @@
 </file>
 
 <file path=ppt/notesSlides/notesSlide18.xml><?xml version="1.0" encoding="utf-8"?>
-<p:notes xmlns:a="http://schemas.openxmlformats.org/drawingml/2006/main" xmlns:p="http://schemas.openxmlformats.org/presentationml/2006/main" xmlns:r="http://schemas.openxmlformats.org/officeDocument/2006/relationships">
+<p:notes xmlns:a="http://schemas.openxmlformats.org/drawingml/2006/main" xmlns:r="http://schemas.openxmlformats.org/officeDocument/2006/relationships" xmlns:p="http://schemas.openxmlformats.org/presentationml/2006/main">
   <p:cSld>
     <p:spTree>
       <p:nvGrpSpPr>
@@ -1126,7 +920,7 @@
         <p:nvSpPr>
           <p:cNvPr id="2" name="Slide Image Placeholder 1"/>
           <p:cNvSpPr>
-            <a:spLocks noGrp="1"/>
+            <a:spLocks noGrp="1" noRot="1" noChangeAspect="1"/>
           </p:cNvSpPr>
           <p:nvPr>
             <p:ph type="sldImg" idx="2"/>
@@ -1141,7 +935,7 @@
             <a:spLocks noGrp="1"/>
           </p:cNvSpPr>
           <p:nvPr>
-            <p:ph type="body" idx="3" sz="quarter"/>
+            <p:ph type="body" sz="quarter" idx="3"/>
           </p:nvPr>
         </p:nvSpPr>
         <p:spPr/>
@@ -1162,7 +956,7 @@
             <a:spLocks noGrp="1"/>
           </p:cNvSpPr>
           <p:nvPr>
-            <p:ph type="sldNum" idx="5" sz="quarter"/>
+            <p:ph type="sldNum" sz="quarter" idx="5"/>
           </p:nvPr>
         </p:nvSpPr>
         <p:spPr/>
@@ -1176,7 +970,7 @@
 </file>
 
 <file path=ppt/notesSlides/notesSlide19.xml><?xml version="1.0" encoding="utf-8"?>
-<p:notes xmlns:a="http://schemas.openxmlformats.org/drawingml/2006/main" xmlns:p="http://schemas.openxmlformats.org/presentationml/2006/main" xmlns:r="http://schemas.openxmlformats.org/officeDocument/2006/relationships">
+<p:notes xmlns:a="http://schemas.openxmlformats.org/drawingml/2006/main" xmlns:r="http://schemas.openxmlformats.org/officeDocument/2006/relationships" xmlns:p="http://schemas.openxmlformats.org/presentationml/2006/main">
   <p:cSld>
     <p:spTree>
       <p:nvGrpSpPr>
@@ -1196,7 +990,7 @@
         <p:nvSpPr>
           <p:cNvPr id="2" name="Slide Image Placeholder 1"/>
           <p:cNvSpPr>
-            <a:spLocks noGrp="1"/>
+            <a:spLocks noGrp="1" noRot="1" noChangeAspect="1"/>
           </p:cNvSpPr>
           <p:nvPr>
             <p:ph type="sldImg" idx="2"/>
@@ -1211,7 +1005,7 @@
             <a:spLocks noGrp="1"/>
           </p:cNvSpPr>
           <p:nvPr>
-            <p:ph type="body" idx="3" sz="quarter"/>
+            <p:ph type="body" sz="quarter" idx="3"/>
           </p:nvPr>
         </p:nvSpPr>
         <p:spPr/>
@@ -1232,7 +1026,7 @@
             <a:spLocks noGrp="1"/>
           </p:cNvSpPr>
           <p:nvPr>
-            <p:ph type="sldNum" idx="5" sz="quarter"/>
+            <p:ph type="sldNum" sz="quarter" idx="5"/>
           </p:nvPr>
         </p:nvSpPr>
         <p:spPr/>
@@ -1246,7 +1040,7 @@
 </file>
 
 <file path=ppt/notesSlides/notesSlide2.xml><?xml version="1.0" encoding="utf-8"?>
-<p:notes xmlns:a="http://schemas.openxmlformats.org/drawingml/2006/main" xmlns:p="http://schemas.openxmlformats.org/presentationml/2006/main" xmlns:r="http://schemas.openxmlformats.org/officeDocument/2006/relationships">
+<p:notes xmlns:a="http://schemas.openxmlformats.org/drawingml/2006/main" xmlns:r="http://schemas.openxmlformats.org/officeDocument/2006/relationships" xmlns:p="http://schemas.openxmlformats.org/presentationml/2006/main">
   <p:cSld>
     <p:spTree>
       <p:nvGrpSpPr>
@@ -1266,7 +1060,7 @@
         <p:nvSpPr>
           <p:cNvPr id="2" name="Slide Image Placeholder 1"/>
           <p:cNvSpPr>
-            <a:spLocks noGrp="1"/>
+            <a:spLocks noGrp="1" noRot="1" noChangeAspect="1"/>
           </p:cNvSpPr>
           <p:nvPr>
             <p:ph type="sldImg" idx="2"/>
@@ -1281,7 +1075,7 @@
             <a:spLocks noGrp="1"/>
           </p:cNvSpPr>
           <p:nvPr>
-            <p:ph type="body" idx="3" sz="quarter"/>
+            <p:ph type="body" sz="quarter" idx="3"/>
           </p:nvPr>
         </p:nvSpPr>
         <p:spPr/>
@@ -1302,7 +1096,7 @@
             <a:spLocks noGrp="1"/>
           </p:cNvSpPr>
           <p:nvPr>
-            <p:ph type="sldNum" idx="5" sz="quarter"/>
+            <p:ph type="sldNum" sz="quarter" idx="5"/>
           </p:nvPr>
         </p:nvSpPr>
         <p:spPr/>
@@ -1316,7 +1110,7 @@
 </file>
 
 <file path=ppt/notesSlides/notesSlide3.xml><?xml version="1.0" encoding="utf-8"?>
-<p:notes xmlns:a="http://schemas.openxmlformats.org/drawingml/2006/main" xmlns:p="http://schemas.openxmlformats.org/presentationml/2006/main" xmlns:r="http://schemas.openxmlformats.org/officeDocument/2006/relationships">
+<p:notes xmlns:a="http://schemas.openxmlformats.org/drawingml/2006/main" xmlns:r="http://schemas.openxmlformats.org/officeDocument/2006/relationships" xmlns:p="http://schemas.openxmlformats.org/presentationml/2006/main">
   <p:cSld>
     <p:spTree>
       <p:nvGrpSpPr>
@@ -1336,7 +1130,7 @@
         <p:nvSpPr>
           <p:cNvPr id="2" name="Slide Image Placeholder 1"/>
           <p:cNvSpPr>
-            <a:spLocks noGrp="1"/>
+            <a:spLocks noGrp="1" noRot="1" noChangeAspect="1"/>
           </p:cNvSpPr>
           <p:nvPr>
             <p:ph type="sldImg" idx="2"/>
@@ -1351,7 +1145,7 @@
             <a:spLocks noGrp="1"/>
           </p:cNvSpPr>
           <p:nvPr>
-            <p:ph type="body" idx="3" sz="quarter"/>
+            <p:ph type="body" sz="quarter" idx="3"/>
           </p:nvPr>
         </p:nvSpPr>
         <p:spPr/>
@@ -1372,7 +1166,7 @@
             <a:spLocks noGrp="1"/>
           </p:cNvSpPr>
           <p:nvPr>
-            <p:ph type="sldNum" idx="5" sz="quarter"/>
+            <p:ph type="sldNum" sz="quarter" idx="5"/>
           </p:nvPr>
         </p:nvSpPr>
         <p:spPr/>
@@ -1386,7 +1180,7 @@
 </file>
 
 <file path=ppt/notesSlides/notesSlide4.xml><?xml version="1.0" encoding="utf-8"?>
-<p:notes xmlns:a="http://schemas.openxmlformats.org/drawingml/2006/main" xmlns:p="http://schemas.openxmlformats.org/presentationml/2006/main" xmlns:r="http://schemas.openxmlformats.org/officeDocument/2006/relationships">
+<p:notes xmlns:a="http://schemas.openxmlformats.org/drawingml/2006/main" xmlns:r="http://schemas.openxmlformats.org/officeDocument/2006/relationships" xmlns:p="http://schemas.openxmlformats.org/presentationml/2006/main">
   <p:cSld>
     <p:spTree>
       <p:nvGrpSpPr>
@@ -1406,7 +1200,7 @@
         <p:nvSpPr>
           <p:cNvPr id="2" name="Slide Image Placeholder 1"/>
           <p:cNvSpPr>
-            <a:spLocks noGrp="1"/>
+            <a:spLocks noGrp="1" noRot="1" noChangeAspect="1"/>
           </p:cNvSpPr>
           <p:nvPr>
             <p:ph type="sldImg" idx="2"/>
@@ -1421,7 +1215,7 @@
             <a:spLocks noGrp="1"/>
           </p:cNvSpPr>
           <p:nvPr>
-            <p:ph type="body" idx="3" sz="quarter"/>
+            <p:ph type="body" sz="quarter" idx="3"/>
           </p:nvPr>
         </p:nvSpPr>
         <p:spPr/>
@@ -1442,7 +1236,7 @@
             <a:spLocks noGrp="1"/>
           </p:cNvSpPr>
           <p:nvPr>
-            <p:ph type="sldNum" idx="5" sz="quarter"/>
+            <p:ph type="sldNum" sz="quarter" idx="5"/>
           </p:nvPr>
         </p:nvSpPr>
         <p:spPr/>
@@ -1456,7 +1250,7 @@
 </file>
 
 <file path=ppt/notesSlides/notesSlide5.xml><?xml version="1.0" encoding="utf-8"?>
-<p:notes xmlns:a="http://schemas.openxmlformats.org/drawingml/2006/main" xmlns:p="http://schemas.openxmlformats.org/presentationml/2006/main" xmlns:r="http://schemas.openxmlformats.org/officeDocument/2006/relationships">
+<p:notes xmlns:a="http://schemas.openxmlformats.org/drawingml/2006/main" xmlns:r="http://schemas.openxmlformats.org/officeDocument/2006/relationships" xmlns:p="http://schemas.openxmlformats.org/presentationml/2006/main">
   <p:cSld>
     <p:spTree>
       <p:nvGrpSpPr>
@@ -1476,7 +1270,7 @@
         <p:nvSpPr>
           <p:cNvPr id="2" name="Slide Image Placeholder 1"/>
           <p:cNvSpPr>
-            <a:spLocks noGrp="1"/>
+            <a:spLocks noGrp="1" noRot="1" noChangeAspect="1"/>
           </p:cNvSpPr>
           <p:nvPr>
             <p:ph type="sldImg" idx="2"/>
@@ -1491,7 +1285,7 @@
             <a:spLocks noGrp="1"/>
           </p:cNvSpPr>
           <p:nvPr>
-            <p:ph type="body" idx="3" sz="quarter"/>
+            <p:ph type="body" sz="quarter" idx="3"/>
           </p:nvPr>
         </p:nvSpPr>
         <p:spPr/>
@@ -1512,7 +1306,7 @@
             <a:spLocks noGrp="1"/>
           </p:cNvSpPr>
           <p:nvPr>
-            <p:ph type="sldNum" idx="5" sz="quarter"/>
+            <p:ph type="sldNum" sz="quarter" idx="5"/>
           </p:nvPr>
         </p:nvSpPr>
         <p:spPr/>
@@ -1526,7 +1320,7 @@
 </file>
 
 <file path=ppt/notesSlides/notesSlide6.xml><?xml version="1.0" encoding="utf-8"?>
-<p:notes xmlns:a="http://schemas.openxmlformats.org/drawingml/2006/main" xmlns:p="http://schemas.openxmlformats.org/presentationml/2006/main" xmlns:r="http://schemas.openxmlformats.org/officeDocument/2006/relationships">
+<p:notes xmlns:a="http://schemas.openxmlformats.org/drawingml/2006/main" xmlns:r="http://schemas.openxmlformats.org/officeDocument/2006/relationships" xmlns:p="http://schemas.openxmlformats.org/presentationml/2006/main">
   <p:cSld>
     <p:spTree>
       <p:nvGrpSpPr>
@@ -1546,7 +1340,7 @@
         <p:nvSpPr>
           <p:cNvPr id="2" name="Slide Image Placeholder 1"/>
           <p:cNvSpPr>
-            <a:spLocks noGrp="1"/>
+            <a:spLocks noGrp="1" noRot="1" noChangeAspect="1"/>
           </p:cNvSpPr>
           <p:nvPr>
             <p:ph type="sldImg" idx="2"/>
@@ -1561,7 +1355,7 @@
             <a:spLocks noGrp="1"/>
           </p:cNvSpPr>
           <p:nvPr>
-            <p:ph type="body" idx="3" sz="quarter"/>
+            <p:ph type="body" sz="quarter" idx="3"/>
           </p:nvPr>
         </p:nvSpPr>
         <p:spPr/>
@@ -1582,7 +1376,7 @@
             <a:spLocks noGrp="1"/>
           </p:cNvSpPr>
           <p:nvPr>
-            <p:ph type="sldNum" idx="5" sz="quarter"/>
+            <p:ph type="sldNum" sz="quarter" idx="5"/>
           </p:nvPr>
         </p:nvSpPr>
         <p:spPr/>
@@ -1596,7 +1390,7 @@
 </file>
 
 <file path=ppt/notesSlides/notesSlide7.xml><?xml version="1.0" encoding="utf-8"?>
-<p:notes xmlns:a="http://schemas.openxmlformats.org/drawingml/2006/main" xmlns:p="http://schemas.openxmlformats.org/presentationml/2006/main" xmlns:r="http://schemas.openxmlformats.org/officeDocument/2006/relationships">
+<p:notes xmlns:a="http://schemas.openxmlformats.org/drawingml/2006/main" xmlns:r="http://schemas.openxmlformats.org/officeDocument/2006/relationships" xmlns:p="http://schemas.openxmlformats.org/presentationml/2006/main">
   <p:cSld>
     <p:spTree>
       <p:nvGrpSpPr>
@@ -1616,7 +1410,7 @@
         <p:nvSpPr>
           <p:cNvPr id="2" name="Slide Image Placeholder 1"/>
           <p:cNvSpPr>
-            <a:spLocks noGrp="1"/>
+            <a:spLocks noGrp="1" noRot="1" noChangeAspect="1"/>
           </p:cNvSpPr>
           <p:nvPr>
             <p:ph type="sldImg" idx="2"/>
@@ -1631,7 +1425,7 @@
             <a:spLocks noGrp="1"/>
           </p:cNvSpPr>
           <p:nvPr>
-            <p:ph type="body" idx="3" sz="quarter"/>
+            <p:ph type="body" sz="quarter" idx="3"/>
           </p:nvPr>
         </p:nvSpPr>
         <p:spPr/>
@@ -1652,7 +1446,7 @@
             <a:spLocks noGrp="1"/>
           </p:cNvSpPr>
           <p:nvPr>
-            <p:ph type="sldNum" idx="5" sz="quarter"/>
+            <p:ph type="sldNum" sz="quarter" idx="5"/>
           </p:nvPr>
         </p:nvSpPr>
         <p:spPr/>
@@ -1666,7 +1460,7 @@
 </file>
 
 <file path=ppt/notesSlides/notesSlide8.xml><?xml version="1.0" encoding="utf-8"?>
-<p:notes xmlns:a="http://schemas.openxmlformats.org/drawingml/2006/main" xmlns:p="http://schemas.openxmlformats.org/presentationml/2006/main" xmlns:r="http://schemas.openxmlformats.org/officeDocument/2006/relationships">
+<p:notes xmlns:a="http://schemas.openxmlformats.org/drawingml/2006/main" xmlns:r="http://schemas.openxmlformats.org/officeDocument/2006/relationships" xmlns:p="http://schemas.openxmlformats.org/presentationml/2006/main">
   <p:cSld>
     <p:spTree>
       <p:nvGrpSpPr>
@@ -1686,7 +1480,7 @@
         <p:nvSpPr>
           <p:cNvPr id="2" name="Slide Image Placeholder 1"/>
           <p:cNvSpPr>
-            <a:spLocks noGrp="1"/>
+            <a:spLocks noGrp="1" noRot="1" noChangeAspect="1"/>
           </p:cNvSpPr>
           <p:nvPr>
             <p:ph type="sldImg" idx="2"/>
@@ -1701,7 +1495,7 @@
             <a:spLocks noGrp="1"/>
           </p:cNvSpPr>
           <p:nvPr>
-            <p:ph type="body" idx="3" sz="quarter"/>
+            <p:ph type="body" sz="quarter" idx="3"/>
           </p:nvPr>
         </p:nvSpPr>
         <p:spPr/>
@@ -1722,7 +1516,7 @@
             <a:spLocks noGrp="1"/>
           </p:cNvSpPr>
           <p:nvPr>
-            <p:ph type="sldNum" idx="5" sz="quarter"/>
+            <p:ph type="sldNum" sz="quarter" idx="5"/>
           </p:nvPr>
         </p:nvSpPr>
         <p:spPr/>
@@ -1736,7 +1530,7 @@
 </file>
 
 <file path=ppt/notesSlides/notesSlide9.xml><?xml version="1.0" encoding="utf-8"?>
-<p:notes xmlns:a="http://schemas.openxmlformats.org/drawingml/2006/main" xmlns:p="http://schemas.openxmlformats.org/presentationml/2006/main" xmlns:r="http://schemas.openxmlformats.org/officeDocument/2006/relationships">
+<p:notes xmlns:a="http://schemas.openxmlformats.org/drawingml/2006/main" xmlns:r="http://schemas.openxmlformats.org/officeDocument/2006/relationships" xmlns:p="http://schemas.openxmlformats.org/presentationml/2006/main">
   <p:cSld>
     <p:spTree>
       <p:nvGrpSpPr>
@@ -1756,7 +1550,7 @@
         <p:nvSpPr>
           <p:cNvPr id="2" name="Slide Image Placeholder 1"/>
           <p:cNvSpPr>
-            <a:spLocks noGrp="1"/>
+            <a:spLocks noGrp="1" noRot="1" noChangeAspect="1"/>
           </p:cNvSpPr>
           <p:nvPr>
             <p:ph type="sldImg" idx="2"/>
@@ -1771,7 +1565,7 @@
             <a:spLocks noGrp="1"/>
           </p:cNvSpPr>
           <p:nvPr>
-            <p:ph type="body" idx="3" sz="quarter"/>
+            <p:ph type="body" sz="quarter" idx="3"/>
           </p:nvPr>
         </p:nvSpPr>
         <p:spPr/>
@@ -1792,7 +1586,7 @@
             <a:spLocks noGrp="1"/>
           </p:cNvSpPr>
           <p:nvPr>
-            <p:ph type="sldNum" idx="5" sz="quarter"/>
+            <p:ph type="sldNum" sz="quarter" idx="5"/>
           </p:nvPr>
         </p:nvSpPr>
         <p:spPr/>
@@ -1843,10 +1637,9 @@
           <a:lstStyle/>
           <a:p>
             <a:r>
-              <a:rPr lang="en-US" smtClean="0"/>
+              <a:rPr lang="en-US"/>
               <a:t>Click to edit Master title style</a:t>
             </a:r>
-            <a:endParaRPr lang="en-US"/>
           </a:p>
         </p:txBody>
       </p:sp>
@@ -1962,10 +1755,9 @@
           </a:lstStyle>
           <a:p>
             <a:r>
-              <a:rPr lang="en-US" smtClean="0"/>
+              <a:rPr lang="en-US"/>
               <a:t>Click to edit Master subtitle style</a:t>
             </a:r>
-            <a:endParaRPr lang="en-US"/>
           </a:p>
         </p:txBody>
       </p:sp>
@@ -1986,7 +1778,7 @@
           <a:p>
             <a:fld id="{5BCAD085-E8A6-8845-BD4E-CB4CCA059FC4}" type="datetimeFigureOut">
               <a:rPr lang="en-US" smtClean="0"/>
-              <a:t>1/27/13</a:t>
+              <a:t>9/12/2026</a:t>
             </a:fld>
             <a:endParaRPr lang="en-US"/>
           </a:p>
@@ -2080,10 +1872,9 @@
           <a:lstStyle/>
           <a:p>
             <a:r>
-              <a:rPr lang="en-US" smtClean="0"/>
+              <a:rPr lang="en-US"/>
               <a:t>Click to edit Master title style</a:t>
             </a:r>
-            <a:endParaRPr lang="en-US"/>
           </a:p>
         </p:txBody>
       </p:sp>
@@ -2104,38 +1895,37 @@
           <a:p>
             <a:pPr lvl="0"/>
             <a:r>
-              <a:rPr lang="en-US" smtClean="0"/>
+              <a:rPr lang="en-US"/>
               <a:t>Click to edit Master text styles</a:t>
             </a:r>
           </a:p>
           <a:p>
             <a:pPr lvl="1"/>
             <a:r>
-              <a:rPr lang="en-US" smtClean="0"/>
+              <a:rPr lang="en-US"/>
               <a:t>Second level</a:t>
             </a:r>
           </a:p>
           <a:p>
             <a:pPr lvl="2"/>
             <a:r>
-              <a:rPr lang="en-US" smtClean="0"/>
+              <a:rPr lang="en-US"/>
               <a:t>Third level</a:t>
             </a:r>
           </a:p>
           <a:p>
             <a:pPr lvl="3"/>
             <a:r>
-              <a:rPr lang="en-US" smtClean="0"/>
+              <a:rPr lang="en-US"/>
               <a:t>Fourth level</a:t>
             </a:r>
           </a:p>
           <a:p>
             <a:pPr lvl="4"/>
             <a:r>
-              <a:rPr lang="en-US" smtClean="0"/>
+              <a:rPr lang="en-US"/>
               <a:t>Fifth level</a:t>
             </a:r>
-            <a:endParaRPr lang="en-US"/>
           </a:p>
         </p:txBody>
       </p:sp>
@@ -2156,7 +1946,7 @@
           <a:p>
             <a:fld id="{5BCAD085-E8A6-8845-BD4E-CB4CCA059FC4}" type="datetimeFigureOut">
               <a:rPr lang="en-US" smtClean="0"/>
-              <a:t>1/27/13</a:t>
+              <a:t>9/12/2026</a:t>
             </a:fld>
             <a:endParaRPr lang="en-US"/>
           </a:p>
@@ -2255,10 +2045,9 @@
           <a:lstStyle/>
           <a:p>
             <a:r>
-              <a:rPr lang="en-US" smtClean="0"/>
+              <a:rPr lang="en-US"/>
               <a:t>Click to edit Master title style</a:t>
             </a:r>
-            <a:endParaRPr lang="en-US"/>
           </a:p>
         </p:txBody>
       </p:sp>
@@ -2284,38 +2073,37 @@
           <a:p>
             <a:pPr lvl="0"/>
             <a:r>
-              <a:rPr lang="en-US" smtClean="0"/>
+              <a:rPr lang="en-US"/>
               <a:t>Click to edit Master text styles</a:t>
             </a:r>
           </a:p>
           <a:p>
             <a:pPr lvl="1"/>
             <a:r>
-              <a:rPr lang="en-US" smtClean="0"/>
+              <a:rPr lang="en-US"/>
               <a:t>Second level</a:t>
             </a:r>
           </a:p>
           <a:p>
             <a:pPr lvl="2"/>
             <a:r>
-              <a:rPr lang="en-US" smtClean="0"/>
+              <a:rPr lang="en-US"/>
               <a:t>Third level</a:t>
             </a:r>
           </a:p>
           <a:p>
             <a:pPr lvl="3"/>
             <a:r>
-              <a:rPr lang="en-US" smtClean="0"/>
+              <a:rPr lang="en-US"/>
               <a:t>Fourth level</a:t>
             </a:r>
           </a:p>
           <a:p>
             <a:pPr lvl="4"/>
             <a:r>
-              <a:rPr lang="en-US" smtClean="0"/>
+              <a:rPr lang="en-US"/>
               <a:t>Fifth level</a:t>
             </a:r>
-            <a:endParaRPr lang="en-US"/>
           </a:p>
         </p:txBody>
       </p:sp>
@@ -2336,7 +2124,7 @@
           <a:p>
             <a:fld id="{5BCAD085-E8A6-8845-BD4E-CB4CCA059FC4}" type="datetimeFigureOut">
               <a:rPr lang="en-US" smtClean="0"/>
-              <a:t>1/27/13</a:t>
+              <a:t>9/12/2026</a:t>
             </a:fld>
             <a:endParaRPr lang="en-US"/>
           </a:p>
@@ -2430,10 +2218,9 @@
           <a:lstStyle/>
           <a:p>
             <a:r>
-              <a:rPr lang="en-US" smtClean="0"/>
+              <a:rPr lang="en-US"/>
               <a:t>Click to edit Master title style</a:t>
             </a:r>
-            <a:endParaRPr lang="en-US"/>
           </a:p>
         </p:txBody>
       </p:sp>
@@ -2454,38 +2241,37 @@
           <a:p>
             <a:pPr lvl="0"/>
             <a:r>
-              <a:rPr lang="en-US" smtClean="0"/>
+              <a:rPr lang="en-US"/>
               <a:t>Click to edit Master text styles</a:t>
             </a:r>
           </a:p>
           <a:p>
             <a:pPr lvl="1"/>
             <a:r>
-              <a:rPr lang="en-US" smtClean="0"/>
+              <a:rPr lang="en-US"/>
               <a:t>Second level</a:t>
             </a:r>
           </a:p>
           <a:p>
             <a:pPr lvl="2"/>
             <a:r>
-              <a:rPr lang="en-US" smtClean="0"/>
+              <a:rPr lang="en-US"/>
               <a:t>Third level</a:t>
             </a:r>
           </a:p>
           <a:p>
             <a:pPr lvl="3"/>
             <a:r>
-              <a:rPr lang="en-US" smtClean="0"/>
+              <a:rPr lang="en-US"/>
               <a:t>Fourth level</a:t>
             </a:r>
           </a:p>
           <a:p>
             <a:pPr lvl="4"/>
             <a:r>
-              <a:rPr lang="en-US" smtClean="0"/>
+              <a:rPr lang="en-US"/>
               <a:t>Fifth level</a:t>
             </a:r>
-            <a:endParaRPr lang="en-US"/>
           </a:p>
         </p:txBody>
       </p:sp>
@@ -2506,7 +2292,7 @@
           <a:p>
             <a:fld id="{5BCAD085-E8A6-8845-BD4E-CB4CCA059FC4}" type="datetimeFigureOut">
               <a:rPr lang="en-US" smtClean="0"/>
-              <a:t>1/27/13</a:t>
+              <a:t>9/12/2026</a:t>
             </a:fld>
             <a:endParaRPr lang="en-US"/>
           </a:p>
@@ -2609,10 +2395,9 @@
           </a:lstStyle>
           <a:p>
             <a:r>
-              <a:rPr lang="en-US" smtClean="0"/>
+              <a:rPr lang="en-US"/>
               <a:t>Click to edit Master title style</a:t>
             </a:r>
-            <a:endParaRPr lang="en-US"/>
           </a:p>
         </p:txBody>
       </p:sp>
@@ -2729,7 +2514,7 @@
           <a:p>
             <a:pPr lvl="0"/>
             <a:r>
-              <a:rPr lang="en-US" smtClean="0"/>
+              <a:rPr lang="en-US"/>
               <a:t>Click to edit Master text styles</a:t>
             </a:r>
           </a:p>
@@ -2752,7 +2537,7 @@
           <a:p>
             <a:fld id="{5BCAD085-E8A6-8845-BD4E-CB4CCA059FC4}" type="datetimeFigureOut">
               <a:rPr lang="en-US" smtClean="0"/>
-              <a:t>1/27/13</a:t>
+              <a:t>9/12/2026</a:t>
             </a:fld>
             <a:endParaRPr lang="en-US"/>
           </a:p>
@@ -2846,10 +2631,9 @@
           <a:lstStyle/>
           <a:p>
             <a:r>
-              <a:rPr lang="en-US" smtClean="0"/>
+              <a:rPr lang="en-US"/>
               <a:t>Click to edit Master title style</a:t>
             </a:r>
-            <a:endParaRPr lang="en-US"/>
           </a:p>
         </p:txBody>
       </p:sp>
@@ -2903,38 +2687,37 @@
           <a:p>
             <a:pPr lvl="0"/>
             <a:r>
-              <a:rPr lang="en-US" smtClean="0"/>
+              <a:rPr lang="en-US"/>
               <a:t>Click to edit Master text styles</a:t>
             </a:r>
           </a:p>
           <a:p>
             <a:pPr lvl="1"/>
             <a:r>
-              <a:rPr lang="en-US" smtClean="0"/>
+              <a:rPr lang="en-US"/>
               <a:t>Second level</a:t>
             </a:r>
           </a:p>
           <a:p>
             <a:pPr lvl="2"/>
             <a:r>
-              <a:rPr lang="en-US" smtClean="0"/>
+              <a:rPr lang="en-US"/>
               <a:t>Third level</a:t>
             </a:r>
           </a:p>
           <a:p>
             <a:pPr lvl="3"/>
             <a:r>
-              <a:rPr lang="en-US" smtClean="0"/>
+              <a:rPr lang="en-US"/>
               <a:t>Fourth level</a:t>
             </a:r>
           </a:p>
           <a:p>
             <a:pPr lvl="4"/>
             <a:r>
-              <a:rPr lang="en-US" smtClean="0"/>
+              <a:rPr lang="en-US"/>
               <a:t>Fifth level</a:t>
             </a:r>
-            <a:endParaRPr lang="en-US"/>
           </a:p>
         </p:txBody>
       </p:sp>
@@ -2988,38 +2771,37 @@
           <a:p>
             <a:pPr lvl="0"/>
             <a:r>
-              <a:rPr lang="en-US" smtClean="0"/>
+              <a:rPr lang="en-US"/>
               <a:t>Click to edit Master text styles</a:t>
             </a:r>
           </a:p>
           <a:p>
             <a:pPr lvl="1"/>
             <a:r>
-              <a:rPr lang="en-US" smtClean="0"/>
+              <a:rPr lang="en-US"/>
               <a:t>Second level</a:t>
             </a:r>
           </a:p>
           <a:p>
             <a:pPr lvl="2"/>
             <a:r>
-              <a:rPr lang="en-US" smtClean="0"/>
+              <a:rPr lang="en-US"/>
               <a:t>Third level</a:t>
             </a:r>
           </a:p>
           <a:p>
             <a:pPr lvl="3"/>
             <a:r>
-              <a:rPr lang="en-US" smtClean="0"/>
+              <a:rPr lang="en-US"/>
               <a:t>Fourth level</a:t>
             </a:r>
           </a:p>
           <a:p>
             <a:pPr lvl="4"/>
             <a:r>
-              <a:rPr lang="en-US" smtClean="0"/>
+              <a:rPr lang="en-US"/>
               <a:t>Fifth level</a:t>
             </a:r>
-            <a:endParaRPr lang="en-US"/>
           </a:p>
         </p:txBody>
       </p:sp>
@@ -3040,7 +2822,7 @@
           <a:p>
             <a:fld id="{5BCAD085-E8A6-8845-BD4E-CB4CCA059FC4}" type="datetimeFigureOut">
               <a:rPr lang="en-US" smtClean="0"/>
-              <a:t>1/27/13</a:t>
+              <a:t>9/12/2026</a:t>
             </a:fld>
             <a:endParaRPr lang="en-US"/>
           </a:p>
@@ -3138,10 +2920,9 @@
           </a:lstStyle>
           <a:p>
             <a:r>
-              <a:rPr lang="en-US" smtClean="0"/>
+              <a:rPr lang="en-US"/>
               <a:t>Click to edit Master title style</a:t>
             </a:r>
-            <a:endParaRPr lang="en-US"/>
           </a:p>
         </p:txBody>
       </p:sp>
@@ -3204,7 +2985,7 @@
           <a:p>
             <a:pPr lvl="0"/>
             <a:r>
-              <a:rPr lang="en-US" smtClean="0"/>
+              <a:rPr lang="en-US"/>
               <a:t>Click to edit Master text styles</a:t>
             </a:r>
           </a:p>
@@ -3260,38 +3041,37 @@
           <a:p>
             <a:pPr lvl="0"/>
             <a:r>
-              <a:rPr lang="en-US" smtClean="0"/>
+              <a:rPr lang="en-US"/>
               <a:t>Click to edit Master text styles</a:t>
             </a:r>
           </a:p>
           <a:p>
             <a:pPr lvl="1"/>
             <a:r>
-              <a:rPr lang="en-US" smtClean="0"/>
+              <a:rPr lang="en-US"/>
               <a:t>Second level</a:t>
             </a:r>
           </a:p>
           <a:p>
             <a:pPr lvl="2"/>
             <a:r>
-              <a:rPr lang="en-US" smtClean="0"/>
+              <a:rPr lang="en-US"/>
               <a:t>Third level</a:t>
             </a:r>
           </a:p>
           <a:p>
             <a:pPr lvl="3"/>
             <a:r>
-              <a:rPr lang="en-US" smtClean="0"/>
+              <a:rPr lang="en-US"/>
               <a:t>Fourth level</a:t>
             </a:r>
           </a:p>
           <a:p>
             <a:pPr lvl="4"/>
             <a:r>
-              <a:rPr lang="en-US" smtClean="0"/>
+              <a:rPr lang="en-US"/>
               <a:t>Fifth level</a:t>
             </a:r>
-            <a:endParaRPr lang="en-US"/>
           </a:p>
         </p:txBody>
       </p:sp>
@@ -3354,7 +3134,7 @@
           <a:p>
             <a:pPr lvl="0"/>
             <a:r>
-              <a:rPr lang="en-US" smtClean="0"/>
+              <a:rPr lang="en-US"/>
               <a:t>Click to edit Master text styles</a:t>
             </a:r>
           </a:p>
@@ -3410,38 +3190,37 @@
           <a:p>
             <a:pPr lvl="0"/>
             <a:r>
-              <a:rPr lang="en-US" smtClean="0"/>
+              <a:rPr lang="en-US"/>
               <a:t>Click to edit Master text styles</a:t>
             </a:r>
           </a:p>
           <a:p>
             <a:pPr lvl="1"/>
             <a:r>
-              <a:rPr lang="en-US" smtClean="0"/>
+              <a:rPr lang="en-US"/>
               <a:t>Second level</a:t>
             </a:r>
           </a:p>
           <a:p>
             <a:pPr lvl="2"/>
             <a:r>
-              <a:rPr lang="en-US" smtClean="0"/>
+              <a:rPr lang="en-US"/>
               <a:t>Third level</a:t>
             </a:r>
           </a:p>
           <a:p>
             <a:pPr lvl="3"/>
             <a:r>
-              <a:rPr lang="en-US" smtClean="0"/>
+              <a:rPr lang="en-US"/>
               <a:t>Fourth level</a:t>
             </a:r>
           </a:p>
           <a:p>
             <a:pPr lvl="4"/>
             <a:r>
-              <a:rPr lang="en-US" smtClean="0"/>
+              <a:rPr lang="en-US"/>
               <a:t>Fifth level</a:t>
             </a:r>
-            <a:endParaRPr lang="en-US"/>
           </a:p>
         </p:txBody>
       </p:sp>
@@ -3462,7 +3241,7 @@
           <a:p>
             <a:fld id="{5BCAD085-E8A6-8845-BD4E-CB4CCA059FC4}" type="datetimeFigureOut">
               <a:rPr lang="en-US" smtClean="0"/>
-              <a:t>1/27/13</a:t>
+              <a:t>9/12/2026</a:t>
             </a:fld>
             <a:endParaRPr lang="en-US"/>
           </a:p>
@@ -3556,10 +3335,9 @@
           <a:lstStyle/>
           <a:p>
             <a:r>
-              <a:rPr lang="en-US" smtClean="0"/>
+              <a:rPr lang="en-US"/>
               <a:t>Click to edit Master title style</a:t>
             </a:r>
-            <a:endParaRPr lang="en-US"/>
           </a:p>
         </p:txBody>
       </p:sp>
@@ -3580,7 +3358,7 @@
           <a:p>
             <a:fld id="{5BCAD085-E8A6-8845-BD4E-CB4CCA059FC4}" type="datetimeFigureOut">
               <a:rPr lang="en-US" smtClean="0"/>
-              <a:t>1/27/13</a:t>
+              <a:t>9/12/2026</a:t>
             </a:fld>
             <a:endParaRPr lang="en-US"/>
           </a:p>
@@ -3675,7 +3453,7 @@
           <a:p>
             <a:fld id="{5BCAD085-E8A6-8845-BD4E-CB4CCA059FC4}" type="datetimeFigureOut">
               <a:rPr lang="en-US" smtClean="0"/>
-              <a:t>1/27/13</a:t>
+              <a:t>9/12/2026</a:t>
             </a:fld>
             <a:endParaRPr lang="en-US"/>
           </a:p>
@@ -3778,10 +3556,9 @@
           </a:lstStyle>
           <a:p>
             <a:r>
-              <a:rPr lang="en-US" smtClean="0"/>
+              <a:rPr lang="en-US"/>
               <a:t>Click to edit Master title style</a:t>
             </a:r>
-            <a:endParaRPr lang="en-US"/>
           </a:p>
         </p:txBody>
       </p:sp>
@@ -3835,38 +3612,37 @@
           <a:p>
             <a:pPr lvl="0"/>
             <a:r>
-              <a:rPr lang="en-US" smtClean="0"/>
+              <a:rPr lang="en-US"/>
               <a:t>Click to edit Master text styles</a:t>
             </a:r>
           </a:p>
           <a:p>
             <a:pPr lvl="1"/>
             <a:r>
-              <a:rPr lang="en-US" smtClean="0"/>
+              <a:rPr lang="en-US"/>
               <a:t>Second level</a:t>
             </a:r>
           </a:p>
           <a:p>
             <a:pPr lvl="2"/>
             <a:r>
-              <a:rPr lang="en-US" smtClean="0"/>
+              <a:rPr lang="en-US"/>
               <a:t>Third level</a:t>
             </a:r>
           </a:p>
           <a:p>
             <a:pPr lvl="3"/>
             <a:r>
-              <a:rPr lang="en-US" smtClean="0"/>
+              <a:rPr lang="en-US"/>
               <a:t>Fourth level</a:t>
             </a:r>
           </a:p>
           <a:p>
             <a:pPr lvl="4"/>
             <a:r>
-              <a:rPr lang="en-US" smtClean="0"/>
+              <a:rPr lang="en-US"/>
               <a:t>Fifth level</a:t>
             </a:r>
-            <a:endParaRPr lang="en-US"/>
           </a:p>
         </p:txBody>
       </p:sp>
@@ -3929,7 +3705,7 @@
           <a:p>
             <a:pPr lvl="0"/>
             <a:r>
-              <a:rPr lang="en-US" smtClean="0"/>
+              <a:rPr lang="en-US"/>
               <a:t>Click to edit Master text styles</a:t>
             </a:r>
           </a:p>
@@ -3952,7 +3728,7 @@
           <a:p>
             <a:fld id="{5BCAD085-E8A6-8845-BD4E-CB4CCA059FC4}" type="datetimeFigureOut">
               <a:rPr lang="en-US" smtClean="0"/>
-              <a:t>1/27/13</a:t>
+              <a:t>9/12/2026</a:t>
             </a:fld>
             <a:endParaRPr lang="en-US"/>
           </a:p>
@@ -4055,10 +3831,9 @@
           </a:lstStyle>
           <a:p>
             <a:r>
-              <a:rPr lang="en-US" smtClean="0"/>
+              <a:rPr lang="en-US"/>
               <a:t>Click to edit Master title style</a:t>
             </a:r>
-            <a:endParaRPr lang="en-US"/>
           </a:p>
         </p:txBody>
       </p:sp>
@@ -4182,7 +3957,7 @@
           <a:p>
             <a:pPr lvl="0"/>
             <a:r>
-              <a:rPr lang="en-US" smtClean="0"/>
+              <a:rPr lang="en-US"/>
               <a:t>Click to edit Master text styles</a:t>
             </a:r>
           </a:p>
@@ -4205,7 +3980,7 @@
           <a:p>
             <a:fld id="{5BCAD085-E8A6-8845-BD4E-CB4CCA059FC4}" type="datetimeFigureOut">
               <a:rPr lang="en-US" smtClean="0"/>
-              <a:t>1/27/13</a:t>
+              <a:t>9/12/2026</a:t>
             </a:fld>
             <a:endParaRPr lang="en-US"/>
           </a:p>
@@ -4314,10 +4089,9 @@
           <a:lstStyle/>
           <a:p>
             <a:r>
-              <a:rPr lang="en-US" smtClean="0"/>
+              <a:rPr lang="en-US"/>
               <a:t>Click to edit Master title style</a:t>
             </a:r>
-            <a:endParaRPr lang="en-US"/>
           </a:p>
         </p:txBody>
       </p:sp>
@@ -4348,38 +4122,37 @@
           <a:p>
             <a:pPr lvl="0"/>
             <a:r>
-              <a:rPr lang="en-US" smtClean="0"/>
+              <a:rPr lang="en-US"/>
               <a:t>Click to edit Master text styles</a:t>
             </a:r>
           </a:p>
           <a:p>
             <a:pPr lvl="1"/>
             <a:r>
-              <a:rPr lang="en-US" smtClean="0"/>
+              <a:rPr lang="en-US"/>
               <a:t>Second level</a:t>
             </a:r>
           </a:p>
           <a:p>
             <a:pPr lvl="2"/>
             <a:r>
-              <a:rPr lang="en-US" smtClean="0"/>
+              <a:rPr lang="en-US"/>
               <a:t>Third level</a:t>
             </a:r>
           </a:p>
           <a:p>
             <a:pPr lvl="3"/>
             <a:r>
-              <a:rPr lang="en-US" smtClean="0"/>
+              <a:rPr lang="en-US"/>
               <a:t>Fourth level</a:t>
             </a:r>
           </a:p>
           <a:p>
             <a:pPr lvl="4"/>
             <a:r>
-              <a:rPr lang="en-US" smtClean="0"/>
+              <a:rPr lang="en-US"/>
               <a:t>Fifth level</a:t>
             </a:r>
-            <a:endParaRPr lang="en-US"/>
           </a:p>
         </p:txBody>
       </p:sp>
@@ -4418,7 +4191,7 @@
           <a:p>
             <a:fld id="{5BCAD085-E8A6-8845-BD4E-CB4CCA059FC4}" type="datetimeFigureOut">
               <a:rPr lang="en-US" smtClean="0"/>
-              <a:t>1/27/13</a:t>
+              <a:t>9/12/2026</a:t>
             </a:fld>
             <a:endParaRPr lang="en-US"/>
           </a:p>
@@ -4777,7 +4550,7 @@
 </file>
 
 <file path=ppt/slides/slide1.xml><?xml version="1.0" encoding="utf-8"?>
-<p:sld xmlns:a="http://schemas.openxmlformats.org/drawingml/2006/main" xmlns:p="http://schemas.openxmlformats.org/presentationml/2006/main" xmlns:r="http://schemas.openxmlformats.org/officeDocument/2006/relationships">
+<p:sld xmlns:a="http://schemas.openxmlformats.org/drawingml/2006/main" xmlns:r="http://schemas.openxmlformats.org/officeDocument/2006/relationships" xmlns:p="http://schemas.openxmlformats.org/presentationml/2006/main">
   <p:cSld>
     <p:spTree>
       <p:nvGrpSpPr>
@@ -4785,7 +4558,14 @@
         <p:cNvGrpSpPr/>
         <p:nvPr/>
       </p:nvGrpSpPr>
-      <p:grpSpPr/>
+      <p:grpSpPr>
+        <a:xfrm>
+          <a:off x="0" y="0"/>
+          <a:ext cx="0" cy="0"/>
+          <a:chOff x="0" y="0"/>
+          <a:chExt cx="0" cy="0"/>
+        </a:xfrm>
+      </p:grpSpPr>
       <p:sp>
         <p:nvSpPr>
           <p:cNvPr id="2" name="Rectangle 1"/>
@@ -4826,6 +4606,7 @@
           <a:lstStyle/>
           <a:p>
             <a:pPr algn="ctr"/>
+            <a:endParaRPr/>
           </a:p>
         </p:txBody>
       </p:sp>
@@ -4853,13 +4634,6 @@
           <a:p>
             <a:br/>
             <a:br/>
-            <a:pPr>
-              <a:defRPr sz="3600" b="1">
-                <a:solidFill>
-                  <a:srgbClr val="FF6B00"/>
-                </a:solidFill>
-              </a:defRPr>
-            </a:pPr>
             <a:r>
               <a:t>Bete (ቤቴ)</a:t>
             </a:r>
@@ -4936,7 +4710,7 @@
           <p:nvPr/>
         </p:nvPicPr>
         <p:blipFill>
-          <a:blip r:embed="rId2"/>
+          <a:blip r:embed="rId3"/>
           <a:stretch>
             <a:fillRect/>
           </a:stretch>
@@ -4993,6 +4767,7 @@
           <a:lstStyle/>
           <a:p>
             <a:pPr algn="ctr"/>
+            <a:endParaRPr/>
           </a:p>
         </p:txBody>
       </p:sp>
@@ -5175,7 +4950,7 @@
 </file>
 
 <file path=ppt/slides/slide10.xml><?xml version="1.0" encoding="utf-8"?>
-<p:sld xmlns:a="http://schemas.openxmlformats.org/drawingml/2006/main" xmlns:p="http://schemas.openxmlformats.org/presentationml/2006/main" xmlns:r="http://schemas.openxmlformats.org/officeDocument/2006/relationships">
+<p:sld xmlns:a="http://schemas.openxmlformats.org/drawingml/2006/main" xmlns:r="http://schemas.openxmlformats.org/officeDocument/2006/relationships" xmlns:p="http://schemas.openxmlformats.org/presentationml/2006/main">
   <p:cSld>
     <p:spTree>
       <p:nvGrpSpPr>
@@ -5183,7 +4958,14 @@
         <p:cNvGrpSpPr/>
         <p:nvPr/>
       </p:nvGrpSpPr>
-      <p:grpSpPr/>
+      <p:grpSpPr>
+        <a:xfrm>
+          <a:off x="0" y="0"/>
+          <a:ext cx="0" cy="0"/>
+          <a:chOff x="0" y="0"/>
+          <a:chExt cx="0" cy="0"/>
+        </a:xfrm>
+      </p:grpSpPr>
       <p:sp>
         <p:nvSpPr>
           <p:cNvPr id="2" name="Rectangle 1"/>
@@ -5226,6 +5008,7 @@
           <a:lstStyle/>
           <a:p>
             <a:pPr algn="ctr"/>
+            <a:endParaRPr/>
           </a:p>
         </p:txBody>
       </p:sp>
@@ -5238,7 +5021,7 @@
           <p:nvPr/>
         </p:nvPicPr>
         <p:blipFill>
-          <a:blip r:embed="rId2"/>
+          <a:blip r:embed="rId3"/>
           <a:stretch>
             <a:fillRect/>
           </a:stretch>
@@ -5302,58 +5085,6 @@
             </a:pPr>
             <a:r>
               <a:t>Clean Ethiopian startup aesthetic with high visual contrast and intuitive layouts</a:t>
-            </a:r>
-          </a:p>
-        </p:txBody>
-      </p:sp>
-      <p:sp>
-        <p:nvSpPr>
-          <p:cNvPr id="5" name="Rounded Rectangle 4"/>
-          <p:cNvSpPr/>
-          <p:nvPr/>
-        </p:nvSpPr>
-        <p:spPr>
-          <a:xfrm>
-            <a:off x="10241280" y="320040"/>
-            <a:ext cx="1280160" cy="384048"/>
-          </a:xfrm>
-          <a:prstGeom prst="roundRect">
-            <a:avLst/>
-          </a:prstGeom>
-          <a:solidFill>
-            <a:srgbClr val="EEF2FF"/>
-          </a:solidFill>
-          <a:ln>
-            <a:noFill/>
-          </a:ln>
-        </p:spPr>
-        <p:style>
-          <a:lnRef idx="1">
-            <a:schemeClr val="accent1"/>
-          </a:lnRef>
-          <a:fillRef idx="3">
-            <a:schemeClr val="accent1"/>
-          </a:fillRef>
-          <a:effectRef idx="2">
-            <a:schemeClr val="accent1"/>
-          </a:effectRef>
-          <a:fontRef idx="minor">
-            <a:schemeClr val="lt1"/>
-          </a:fontRef>
-        </p:style>
-        <p:txBody>
-          <a:bodyPr rtlCol="0" anchor="ctr"/>
-          <a:lstStyle/>
-          <a:p>
-            <a:pPr algn="ctr">
-              <a:defRPr sz="1000" b="1">
-                <a:solidFill>
-                  <a:srgbClr val="0052CC"/>
-                </a:solidFill>
-              </a:defRPr>
-            </a:pPr>
-            <a:r>
-              <a:t>Bete Defense</a:t>
             </a:r>
           </a:p>
         </p:txBody>
@@ -5400,6 +5131,7 @@
           <a:lstStyle/>
           <a:p>
             <a:pPr algn="ctr"/>
+            <a:endParaRPr/>
           </a:p>
         </p:txBody>
       </p:sp>
@@ -5412,7 +5144,7 @@
           <p:nvPr/>
         </p:nvPicPr>
         <p:blipFill>
-          <a:blip r:embed="rId3"/>
+          <a:blip r:embed="rId4"/>
           <a:stretch>
             <a:fillRect/>
           </a:stretch>
@@ -5519,6 +5251,7 @@
           <a:lstStyle/>
           <a:p>
             <a:pPr algn="ctr"/>
+            <a:endParaRPr/>
           </a:p>
         </p:txBody>
       </p:sp>
@@ -5531,7 +5264,7 @@
           <p:nvPr/>
         </p:nvPicPr>
         <p:blipFill>
-          <a:blip r:embed="rId4"/>
+          <a:blip r:embed="rId5"/>
           <a:stretch>
             <a:fillRect/>
           </a:stretch>
@@ -5638,6 +5371,7 @@
           <a:lstStyle/>
           <a:p>
             <a:pPr algn="ctr"/>
+            <a:endParaRPr/>
           </a:p>
         </p:txBody>
       </p:sp>
@@ -5650,7 +5384,7 @@
           <p:nvPr/>
         </p:nvPicPr>
         <p:blipFill>
-          <a:blip r:embed="rId5"/>
+          <a:blip r:embed="rId6"/>
           <a:stretch>
             <a:fillRect/>
           </a:stretch>
@@ -5757,6 +5491,7 @@
           <a:lstStyle/>
           <a:p>
             <a:pPr algn="ctr"/>
+            <a:endParaRPr/>
           </a:p>
         </p:txBody>
       </p:sp>
@@ -5769,7 +5504,7 @@
           <p:nvPr/>
         </p:nvPicPr>
         <p:blipFill>
-          <a:blip r:embed="rId6"/>
+          <a:blip r:embed="rId7"/>
           <a:stretch>
             <a:fillRect/>
           </a:stretch>
@@ -5843,7 +5578,7 @@
 </file>
 
 <file path=ppt/slides/slide11.xml><?xml version="1.0" encoding="utf-8"?>
-<p:sld xmlns:a="http://schemas.openxmlformats.org/drawingml/2006/main" xmlns:p="http://schemas.openxmlformats.org/presentationml/2006/main" xmlns:r="http://schemas.openxmlformats.org/officeDocument/2006/relationships">
+<p:sld xmlns:a="http://schemas.openxmlformats.org/drawingml/2006/main" xmlns:r="http://schemas.openxmlformats.org/officeDocument/2006/relationships" xmlns:p="http://schemas.openxmlformats.org/presentationml/2006/main">
   <p:cSld>
     <p:spTree>
       <p:nvGrpSpPr>
@@ -5851,7 +5586,14 @@
         <p:cNvGrpSpPr/>
         <p:nvPr/>
       </p:nvGrpSpPr>
-      <p:grpSpPr/>
+      <p:grpSpPr>
+        <a:xfrm>
+          <a:off x="0" y="0"/>
+          <a:ext cx="0" cy="0"/>
+          <a:chOff x="0" y="0"/>
+          <a:chExt cx="0" cy="0"/>
+        </a:xfrm>
+      </p:grpSpPr>
       <p:sp>
         <p:nvSpPr>
           <p:cNvPr id="2" name="Rectangle 1"/>
@@ -5894,6 +5636,7 @@
           <a:lstStyle/>
           <a:p>
             <a:pPr algn="ctr"/>
+            <a:endParaRPr/>
           </a:p>
         </p:txBody>
       </p:sp>
@@ -5906,7 +5649,7 @@
           <p:nvPr/>
         </p:nvPicPr>
         <p:blipFill>
-          <a:blip r:embed="rId2"/>
+          <a:blip r:embed="rId3"/>
           <a:stretch>
             <a:fillRect/>
           </a:stretch>
@@ -5970,58 +5713,6 @@
             </a:pPr>
             <a:r>
               <a:t>Core MongoDB collections, document schemas, and relational integrity</a:t>
-            </a:r>
-          </a:p>
-        </p:txBody>
-      </p:sp>
-      <p:sp>
-        <p:nvSpPr>
-          <p:cNvPr id="5" name="Rounded Rectangle 4"/>
-          <p:cNvSpPr/>
-          <p:nvPr/>
-        </p:nvSpPr>
-        <p:spPr>
-          <a:xfrm>
-            <a:off x="10241280" y="320040"/>
-            <a:ext cx="1280160" cy="384048"/>
-          </a:xfrm>
-          <a:prstGeom prst="roundRect">
-            <a:avLst/>
-          </a:prstGeom>
-          <a:solidFill>
-            <a:srgbClr val="EEF2FF"/>
-          </a:solidFill>
-          <a:ln>
-            <a:noFill/>
-          </a:ln>
-        </p:spPr>
-        <p:style>
-          <a:lnRef idx="1">
-            <a:schemeClr val="accent1"/>
-          </a:lnRef>
-          <a:fillRef idx="3">
-            <a:schemeClr val="accent1"/>
-          </a:fillRef>
-          <a:effectRef idx="2">
-            <a:schemeClr val="accent1"/>
-          </a:effectRef>
-          <a:fontRef idx="minor">
-            <a:schemeClr val="lt1"/>
-          </a:fontRef>
-        </p:style>
-        <p:txBody>
-          <a:bodyPr rtlCol="0" anchor="ctr"/>
-          <a:lstStyle/>
-          <a:p>
-            <a:pPr algn="ctr">
-              <a:defRPr sz="1000" b="1">
-                <a:solidFill>
-                  <a:srgbClr val="0052CC"/>
-                </a:solidFill>
-              </a:defRPr>
-            </a:pPr>
-            <a:r>
-              <a:t>Bete Defense</a:t>
             </a:r>
           </a:p>
         </p:txBody>
@@ -6068,6 +5759,7 @@
           <a:lstStyle/>
           <a:p>
             <a:pPr algn="ctr"/>
+            <a:endParaRPr/>
           </a:p>
         </p:txBody>
       </p:sp>
@@ -6208,6 +5900,7 @@
           <a:lstStyle/>
           <a:p>
             <a:pPr algn="ctr"/>
+            <a:endParaRPr/>
           </a:p>
         </p:txBody>
       </p:sp>
@@ -6348,6 +6041,7 @@
           <a:lstStyle/>
           <a:p>
             <a:pPr algn="ctr"/>
+            <a:endParaRPr/>
           </a:p>
         </p:txBody>
       </p:sp>
@@ -6488,6 +6182,7 @@
           <a:lstStyle/>
           <a:p>
             <a:pPr algn="ctr"/>
+            <a:endParaRPr/>
           </a:p>
         </p:txBody>
       </p:sp>
@@ -6595,7 +6290,7 @@
 </file>
 
 <file path=ppt/slides/slide12.xml><?xml version="1.0" encoding="utf-8"?>
-<p:sld xmlns:a="http://schemas.openxmlformats.org/drawingml/2006/main" xmlns:p="http://schemas.openxmlformats.org/presentationml/2006/main" xmlns:r="http://schemas.openxmlformats.org/officeDocument/2006/relationships">
+<p:sld xmlns:a="http://schemas.openxmlformats.org/drawingml/2006/main" xmlns:r="http://schemas.openxmlformats.org/officeDocument/2006/relationships" xmlns:p="http://schemas.openxmlformats.org/presentationml/2006/main">
   <p:cSld>
     <p:spTree>
       <p:nvGrpSpPr>
@@ -6603,7 +6298,14 @@
         <p:cNvGrpSpPr/>
         <p:nvPr/>
       </p:nvGrpSpPr>
-      <p:grpSpPr/>
+      <p:grpSpPr>
+        <a:xfrm>
+          <a:off x="0" y="0"/>
+          <a:ext cx="0" cy="0"/>
+          <a:chOff x="0" y="0"/>
+          <a:chExt cx="0" cy="0"/>
+        </a:xfrm>
+      </p:grpSpPr>
       <p:sp>
         <p:nvSpPr>
           <p:cNvPr id="2" name="Rectangle 1"/>
@@ -6646,6 +6348,7 @@
           <a:lstStyle/>
           <a:p>
             <a:pPr algn="ctr"/>
+            <a:endParaRPr/>
           </a:p>
         </p:txBody>
       </p:sp>
@@ -6658,7 +6361,7 @@
           <p:nvPr/>
         </p:nvPicPr>
         <p:blipFill>
-          <a:blip r:embed="rId2"/>
+          <a:blip r:embed="rId3"/>
           <a:stretch>
             <a:fillRect/>
           </a:stretch>
@@ -6722,58 +6425,6 @@
             </a:pPr>
             <a:r>
               <a:t>Production technology stack powering the Bete platform</a:t>
-            </a:r>
-          </a:p>
-        </p:txBody>
-      </p:sp>
-      <p:sp>
-        <p:nvSpPr>
-          <p:cNvPr id="5" name="Rounded Rectangle 4"/>
-          <p:cNvSpPr/>
-          <p:nvPr/>
-        </p:nvSpPr>
-        <p:spPr>
-          <a:xfrm>
-            <a:off x="10241280" y="320040"/>
-            <a:ext cx="1280160" cy="384048"/>
-          </a:xfrm>
-          <a:prstGeom prst="roundRect">
-            <a:avLst/>
-          </a:prstGeom>
-          <a:solidFill>
-            <a:srgbClr val="EEF2FF"/>
-          </a:solidFill>
-          <a:ln>
-            <a:noFill/>
-          </a:ln>
-        </p:spPr>
-        <p:style>
-          <a:lnRef idx="1">
-            <a:schemeClr val="accent1"/>
-          </a:lnRef>
-          <a:fillRef idx="3">
-            <a:schemeClr val="accent1"/>
-          </a:fillRef>
-          <a:effectRef idx="2">
-            <a:schemeClr val="accent1"/>
-          </a:effectRef>
-          <a:fontRef idx="minor">
-            <a:schemeClr val="lt1"/>
-          </a:fontRef>
-        </p:style>
-        <p:txBody>
-          <a:bodyPr rtlCol="0" anchor="ctr"/>
-          <a:lstStyle/>
-          <a:p>
-            <a:pPr algn="ctr">
-              <a:defRPr sz="1000" b="1">
-                <a:solidFill>
-                  <a:srgbClr val="0052CC"/>
-                </a:solidFill>
-              </a:defRPr>
-            </a:pPr>
-            <a:r>
-              <a:t>Bete Defense</a:t>
             </a:r>
           </a:p>
         </p:txBody>
@@ -6820,6 +6471,7 @@
           <a:lstStyle/>
           <a:p>
             <a:pPr algn="ctr"/>
+            <a:endParaRPr/>
           </a:p>
         </p:txBody>
       </p:sp>
@@ -6975,6 +6627,7 @@
           <a:lstStyle/>
           <a:p>
             <a:pPr algn="ctr"/>
+            <a:endParaRPr/>
           </a:p>
         </p:txBody>
       </p:sp>
@@ -7130,6 +6783,7 @@
           <a:lstStyle/>
           <a:p>
             <a:pPr algn="ctr"/>
+            <a:endParaRPr/>
           </a:p>
         </p:txBody>
       </p:sp>
@@ -7252,7 +6906,7 @@
 </file>
 
 <file path=ppt/slides/slide13.xml><?xml version="1.0" encoding="utf-8"?>
-<p:sld xmlns:a="http://schemas.openxmlformats.org/drawingml/2006/main" xmlns:p="http://schemas.openxmlformats.org/presentationml/2006/main" xmlns:r="http://schemas.openxmlformats.org/officeDocument/2006/relationships">
+<p:sld xmlns:a="http://schemas.openxmlformats.org/drawingml/2006/main" xmlns:r="http://schemas.openxmlformats.org/officeDocument/2006/relationships" xmlns:p="http://schemas.openxmlformats.org/presentationml/2006/main">
   <p:cSld>
     <p:spTree>
       <p:nvGrpSpPr>
@@ -7260,7 +6914,14 @@
         <p:cNvGrpSpPr/>
         <p:nvPr/>
       </p:nvGrpSpPr>
-      <p:grpSpPr/>
+      <p:grpSpPr>
+        <a:xfrm>
+          <a:off x="0" y="0"/>
+          <a:ext cx="0" cy="0"/>
+          <a:chOff x="0" y="0"/>
+          <a:chExt cx="0" cy="0"/>
+        </a:xfrm>
+      </p:grpSpPr>
       <p:sp>
         <p:nvSpPr>
           <p:cNvPr id="2" name="Rectangle 1"/>
@@ -7303,6 +6964,7 @@
           <a:lstStyle/>
           <a:p>
             <a:pPr algn="ctr"/>
+            <a:endParaRPr/>
           </a:p>
         </p:txBody>
       </p:sp>
@@ -7315,7 +6977,7 @@
           <p:nvPr/>
         </p:nvPicPr>
         <p:blipFill>
-          <a:blip r:embed="rId2"/>
+          <a:blip r:embed="rId3"/>
           <a:stretch>
             <a:fillRect/>
           </a:stretch>
@@ -7379,58 +7041,6 @@
             </a:pPr>
             <a:r>
               <a:t>Multi-layered defensive architecture protecting user identity, privacy, and data</a:t>
-            </a:r>
-          </a:p>
-        </p:txBody>
-      </p:sp>
-      <p:sp>
-        <p:nvSpPr>
-          <p:cNvPr id="5" name="Rounded Rectangle 4"/>
-          <p:cNvSpPr/>
-          <p:nvPr/>
-        </p:nvSpPr>
-        <p:spPr>
-          <a:xfrm>
-            <a:off x="10241280" y="320040"/>
-            <a:ext cx="1280160" cy="384048"/>
-          </a:xfrm>
-          <a:prstGeom prst="roundRect">
-            <a:avLst/>
-          </a:prstGeom>
-          <a:solidFill>
-            <a:srgbClr val="EEF2FF"/>
-          </a:solidFill>
-          <a:ln>
-            <a:noFill/>
-          </a:ln>
-        </p:spPr>
-        <p:style>
-          <a:lnRef idx="1">
-            <a:schemeClr val="accent1"/>
-          </a:lnRef>
-          <a:fillRef idx="3">
-            <a:schemeClr val="accent1"/>
-          </a:fillRef>
-          <a:effectRef idx="2">
-            <a:schemeClr val="accent1"/>
-          </a:effectRef>
-          <a:fontRef idx="minor">
-            <a:schemeClr val="lt1"/>
-          </a:fontRef>
-        </p:style>
-        <p:txBody>
-          <a:bodyPr rtlCol="0" anchor="ctr"/>
-          <a:lstStyle/>
-          <a:p>
-            <a:pPr algn="ctr">
-              <a:defRPr sz="1000" b="1">
-                <a:solidFill>
-                  <a:srgbClr val="0052CC"/>
-                </a:solidFill>
-              </a:defRPr>
-            </a:pPr>
-            <a:r>
-              <a:t>Bete Defense</a:t>
             </a:r>
           </a:p>
         </p:txBody>
@@ -7477,6 +7087,7 @@
           <a:lstStyle/>
           <a:p>
             <a:pPr algn="ctr"/>
+            <a:endParaRPr/>
           </a:p>
         </p:txBody>
       </p:sp>
@@ -7617,6 +7228,7 @@
           <a:lstStyle/>
           <a:p>
             <a:pPr algn="ctr"/>
+            <a:endParaRPr/>
           </a:p>
         </p:txBody>
       </p:sp>
@@ -7757,6 +7369,7 @@
           <a:lstStyle/>
           <a:p>
             <a:pPr algn="ctr"/>
+            <a:endParaRPr/>
           </a:p>
         </p:txBody>
       </p:sp>
@@ -7897,6 +7510,7 @@
           <a:lstStyle/>
           <a:p>
             <a:pPr algn="ctr"/>
+            <a:endParaRPr/>
           </a:p>
         </p:txBody>
       </p:sp>
@@ -8004,7 +7618,7 @@
 </file>
 
 <file path=ppt/slides/slide14.xml><?xml version="1.0" encoding="utf-8"?>
-<p:sld xmlns:a="http://schemas.openxmlformats.org/drawingml/2006/main" xmlns:p="http://schemas.openxmlformats.org/presentationml/2006/main" xmlns:r="http://schemas.openxmlformats.org/officeDocument/2006/relationships">
+<p:sld xmlns:a="http://schemas.openxmlformats.org/drawingml/2006/main" xmlns:r="http://schemas.openxmlformats.org/officeDocument/2006/relationships" xmlns:p="http://schemas.openxmlformats.org/presentationml/2006/main">
   <p:cSld>
     <p:spTree>
       <p:nvGrpSpPr>
@@ -8012,7 +7626,14 @@
         <p:cNvGrpSpPr/>
         <p:nvPr/>
       </p:nvGrpSpPr>
-      <p:grpSpPr/>
+      <p:grpSpPr>
+        <a:xfrm>
+          <a:off x="0" y="0"/>
+          <a:ext cx="0" cy="0"/>
+          <a:chOff x="0" y="0"/>
+          <a:chExt cx="0" cy="0"/>
+        </a:xfrm>
+      </p:grpSpPr>
       <p:sp>
         <p:nvSpPr>
           <p:cNvPr id="2" name="Rectangle 1"/>
@@ -8055,6 +7676,7 @@
           <a:lstStyle/>
           <a:p>
             <a:pPr algn="ctr"/>
+            <a:endParaRPr/>
           </a:p>
         </p:txBody>
       </p:sp>
@@ -8067,7 +7689,7 @@
           <p:nvPr/>
         </p:nvPicPr>
         <p:blipFill>
-          <a:blip r:embed="rId2"/>
+          <a:blip r:embed="rId3"/>
           <a:stretch>
             <a:fillRect/>
           </a:stretch>
@@ -8131,58 +7753,6 @@
             </a:pPr>
             <a:r>
               <a:t>Comprehensive verification across functionality, UI/UX, APIs, and physical devices</a:t>
-            </a:r>
-          </a:p>
-        </p:txBody>
-      </p:sp>
-      <p:sp>
-        <p:nvSpPr>
-          <p:cNvPr id="5" name="Rounded Rectangle 4"/>
-          <p:cNvSpPr/>
-          <p:nvPr/>
-        </p:nvSpPr>
-        <p:spPr>
-          <a:xfrm>
-            <a:off x="10241280" y="320040"/>
-            <a:ext cx="1280160" cy="384048"/>
-          </a:xfrm>
-          <a:prstGeom prst="roundRect">
-            <a:avLst/>
-          </a:prstGeom>
-          <a:solidFill>
-            <a:srgbClr val="EEF2FF"/>
-          </a:solidFill>
-          <a:ln>
-            <a:noFill/>
-          </a:ln>
-        </p:spPr>
-        <p:style>
-          <a:lnRef idx="1">
-            <a:schemeClr val="accent1"/>
-          </a:lnRef>
-          <a:fillRef idx="3">
-            <a:schemeClr val="accent1"/>
-          </a:fillRef>
-          <a:effectRef idx="2">
-            <a:schemeClr val="accent1"/>
-          </a:effectRef>
-          <a:fontRef idx="minor">
-            <a:schemeClr val="lt1"/>
-          </a:fontRef>
-        </p:style>
-        <p:txBody>
-          <a:bodyPr rtlCol="0" anchor="ctr"/>
-          <a:lstStyle/>
-          <a:p>
-            <a:pPr algn="ctr">
-              <a:defRPr sz="1000" b="1">
-                <a:solidFill>
-                  <a:srgbClr val="0052CC"/>
-                </a:solidFill>
-              </a:defRPr>
-            </a:pPr>
-            <a:r>
-              <a:t>Bete Defense</a:t>
             </a:r>
           </a:p>
         </p:txBody>
@@ -8229,6 +7799,7 @@
           <a:lstStyle/>
           <a:p>
             <a:pPr algn="ctr"/>
+            <a:endParaRPr/>
           </a:p>
         </p:txBody>
       </p:sp>
@@ -8369,6 +7940,7 @@
           <a:lstStyle/>
           <a:p>
             <a:pPr algn="ctr"/>
+            <a:endParaRPr/>
           </a:p>
         </p:txBody>
       </p:sp>
@@ -8509,6 +8081,7 @@
           <a:lstStyle/>
           <a:p>
             <a:pPr algn="ctr"/>
+            <a:endParaRPr/>
           </a:p>
         </p:txBody>
       </p:sp>
@@ -8649,6 +8222,7 @@
           <a:lstStyle/>
           <a:p>
             <a:pPr algn="ctr"/>
+            <a:endParaRPr/>
           </a:p>
         </p:txBody>
       </p:sp>
@@ -8756,7 +8330,7 @@
 </file>
 
 <file path=ppt/slides/slide15.xml><?xml version="1.0" encoding="utf-8"?>
-<p:sld xmlns:a="http://schemas.openxmlformats.org/drawingml/2006/main" xmlns:p="http://schemas.openxmlformats.org/presentationml/2006/main" xmlns:r="http://schemas.openxmlformats.org/officeDocument/2006/relationships">
+<p:sld xmlns:a="http://schemas.openxmlformats.org/drawingml/2006/main" xmlns:r="http://schemas.openxmlformats.org/officeDocument/2006/relationships" xmlns:p="http://schemas.openxmlformats.org/presentationml/2006/main">
   <p:cSld>
     <p:spTree>
       <p:nvGrpSpPr>
@@ -8764,7 +8338,14 @@
         <p:cNvGrpSpPr/>
         <p:nvPr/>
       </p:nvGrpSpPr>
-      <p:grpSpPr/>
+      <p:grpSpPr>
+        <a:xfrm>
+          <a:off x="0" y="0"/>
+          <a:ext cx="0" cy="0"/>
+          <a:chOff x="0" y="0"/>
+          <a:chExt cx="0" cy="0"/>
+        </a:xfrm>
+      </p:grpSpPr>
       <p:sp>
         <p:nvSpPr>
           <p:cNvPr id="2" name="Rectangle 1"/>
@@ -8807,6 +8388,7 @@
           <a:lstStyle/>
           <a:p>
             <a:pPr algn="ctr"/>
+            <a:endParaRPr/>
           </a:p>
         </p:txBody>
       </p:sp>
@@ -8819,7 +8401,7 @@
           <p:nvPr/>
         </p:nvPicPr>
         <p:blipFill>
-          <a:blip r:embed="rId2"/>
+          <a:blip r:embed="rId3"/>
           <a:stretch>
             <a:fillRect/>
           </a:stretch>
@@ -8883,58 +8465,6 @@
             </a:pPr>
             <a:r>
               <a:t>Tangible achievements and screenshots of the functional deployed system</a:t>
-            </a:r>
-          </a:p>
-        </p:txBody>
-      </p:sp>
-      <p:sp>
-        <p:nvSpPr>
-          <p:cNvPr id="5" name="Rounded Rectangle 4"/>
-          <p:cNvSpPr/>
-          <p:nvPr/>
-        </p:nvSpPr>
-        <p:spPr>
-          <a:xfrm>
-            <a:off x="10241280" y="320040"/>
-            <a:ext cx="1280160" cy="384048"/>
-          </a:xfrm>
-          <a:prstGeom prst="roundRect">
-            <a:avLst/>
-          </a:prstGeom>
-          <a:solidFill>
-            <a:srgbClr val="EEF2FF"/>
-          </a:solidFill>
-          <a:ln>
-            <a:noFill/>
-          </a:ln>
-        </p:spPr>
-        <p:style>
-          <a:lnRef idx="1">
-            <a:schemeClr val="accent1"/>
-          </a:lnRef>
-          <a:fillRef idx="3">
-            <a:schemeClr val="accent1"/>
-          </a:fillRef>
-          <a:effectRef idx="2">
-            <a:schemeClr val="accent1"/>
-          </a:effectRef>
-          <a:fontRef idx="minor">
-            <a:schemeClr val="lt1"/>
-          </a:fontRef>
-        </p:style>
-        <p:txBody>
-          <a:bodyPr rtlCol="0" anchor="ctr"/>
-          <a:lstStyle/>
-          <a:p>
-            <a:pPr algn="ctr">
-              <a:defRPr sz="1000" b="1">
-                <a:solidFill>
-                  <a:srgbClr val="0052CC"/>
-                </a:solidFill>
-              </a:defRPr>
-            </a:pPr>
-            <a:r>
-              <a:t>Bete Defense</a:t>
             </a:r>
           </a:p>
         </p:txBody>
@@ -8981,6 +8511,7 @@
           <a:lstStyle/>
           <a:p>
             <a:pPr algn="ctr"/>
+            <a:endParaRPr/>
           </a:p>
         </p:txBody>
       </p:sp>
@@ -9073,6 +8604,7 @@
           <a:lstStyle/>
           <a:p>
             <a:pPr algn="ctr"/>
+            <a:endParaRPr/>
           </a:p>
         </p:txBody>
       </p:sp>
@@ -9085,7 +8617,7 @@
           <p:nvPr/>
         </p:nvPicPr>
         <p:blipFill>
-          <a:blip r:embed="rId3"/>
+          <a:blip r:embed="rId4"/>
           <a:stretch>
             <a:fillRect/>
           </a:stretch>
@@ -9189,6 +8721,7 @@
           <a:lstStyle/>
           <a:p>
             <a:pPr algn="ctr"/>
+            <a:endParaRPr/>
           </a:p>
         </p:txBody>
       </p:sp>
@@ -9201,7 +8734,7 @@
           <p:nvPr/>
         </p:nvPicPr>
         <p:blipFill>
-          <a:blip r:embed="rId4"/>
+          <a:blip r:embed="rId5"/>
           <a:stretch>
             <a:fillRect/>
           </a:stretch>
@@ -9305,6 +8838,7 @@
           <a:lstStyle/>
           <a:p>
             <a:pPr algn="ctr"/>
+            <a:endParaRPr/>
           </a:p>
         </p:txBody>
       </p:sp>
@@ -9317,7 +8851,7 @@
           <p:nvPr/>
         </p:nvPicPr>
         <p:blipFill>
-          <a:blip r:embed="rId5"/>
+          <a:blip r:embed="rId6"/>
           <a:stretch>
             <a:fillRect/>
           </a:stretch>
@@ -9388,7 +8922,7 @@
 </file>
 
 <file path=ppt/slides/slide16.xml><?xml version="1.0" encoding="utf-8"?>
-<p:sld xmlns:a="http://schemas.openxmlformats.org/drawingml/2006/main" xmlns:p="http://schemas.openxmlformats.org/presentationml/2006/main" xmlns:r="http://schemas.openxmlformats.org/officeDocument/2006/relationships">
+<p:sld xmlns:a="http://schemas.openxmlformats.org/drawingml/2006/main" xmlns:r="http://schemas.openxmlformats.org/officeDocument/2006/relationships" xmlns:p="http://schemas.openxmlformats.org/presentationml/2006/main">
   <p:cSld>
     <p:spTree>
       <p:nvGrpSpPr>
@@ -9396,7 +8930,14 @@
         <p:cNvGrpSpPr/>
         <p:nvPr/>
       </p:nvGrpSpPr>
-      <p:grpSpPr/>
+      <p:grpSpPr>
+        <a:xfrm>
+          <a:off x="0" y="0"/>
+          <a:ext cx="0" cy="0"/>
+          <a:chOff x="0" y="0"/>
+          <a:chExt cx="0" cy="0"/>
+        </a:xfrm>
+      </p:grpSpPr>
       <p:sp>
         <p:nvSpPr>
           <p:cNvPr id="2" name="Rectangle 1"/>
@@ -9439,6 +8980,7 @@
           <a:lstStyle/>
           <a:p>
             <a:pPr algn="ctr"/>
+            <a:endParaRPr/>
           </a:p>
         </p:txBody>
       </p:sp>
@@ -9451,7 +8993,7 @@
           <p:nvPr/>
         </p:nvPicPr>
         <p:blipFill>
-          <a:blip r:embed="rId2"/>
+          <a:blip r:embed="rId3"/>
           <a:stretch>
             <a:fillRect/>
           </a:stretch>
@@ -9515,58 +9057,6 @@
             </a:pPr>
             <a:r>
               <a:t>Key technical obstacles encountered during development and how they were overcome</a:t>
-            </a:r>
-          </a:p>
-        </p:txBody>
-      </p:sp>
-      <p:sp>
-        <p:nvSpPr>
-          <p:cNvPr id="5" name="Rounded Rectangle 4"/>
-          <p:cNvSpPr/>
-          <p:nvPr/>
-        </p:nvSpPr>
-        <p:spPr>
-          <a:xfrm>
-            <a:off x="10241280" y="320040"/>
-            <a:ext cx="1280160" cy="384048"/>
-          </a:xfrm>
-          <a:prstGeom prst="roundRect">
-            <a:avLst/>
-          </a:prstGeom>
-          <a:solidFill>
-            <a:srgbClr val="EEF2FF"/>
-          </a:solidFill>
-          <a:ln>
-            <a:noFill/>
-          </a:ln>
-        </p:spPr>
-        <p:style>
-          <a:lnRef idx="1">
-            <a:schemeClr val="accent1"/>
-          </a:lnRef>
-          <a:fillRef idx="3">
-            <a:schemeClr val="accent1"/>
-          </a:fillRef>
-          <a:effectRef idx="2">
-            <a:schemeClr val="accent1"/>
-          </a:effectRef>
-          <a:fontRef idx="minor">
-            <a:schemeClr val="lt1"/>
-          </a:fontRef>
-        </p:style>
-        <p:txBody>
-          <a:bodyPr rtlCol="0" anchor="ctr"/>
-          <a:lstStyle/>
-          <a:p>
-            <a:pPr algn="ctr">
-              <a:defRPr sz="1000" b="1">
-                <a:solidFill>
-                  <a:srgbClr val="0052CC"/>
-                </a:solidFill>
-              </a:defRPr>
-            </a:pPr>
-            <a:r>
-              <a:t>Bete Defense</a:t>
             </a:r>
           </a:p>
         </p:txBody>
@@ -9613,6 +9103,7 @@
           <a:lstStyle/>
           <a:p>
             <a:pPr algn="ctr"/>
+            <a:endParaRPr/>
           </a:p>
         </p:txBody>
       </p:sp>
@@ -9723,6 +9214,7 @@
           <a:lstStyle/>
           <a:p>
             <a:pPr algn="ctr"/>
+            <a:endParaRPr/>
           </a:p>
         </p:txBody>
       </p:sp>
@@ -9833,6 +9325,7 @@
           <a:lstStyle/>
           <a:p>
             <a:pPr algn="ctr"/>
+            <a:endParaRPr/>
           </a:p>
         </p:txBody>
       </p:sp>
@@ -9943,6 +9436,7 @@
           <a:lstStyle/>
           <a:p>
             <a:pPr algn="ctr"/>
+            <a:endParaRPr/>
           </a:p>
         </p:txBody>
       </p:sp>
@@ -10020,7 +9514,7 @@
 </file>
 
 <file path=ppt/slides/slide17.xml><?xml version="1.0" encoding="utf-8"?>
-<p:sld xmlns:a="http://schemas.openxmlformats.org/drawingml/2006/main" xmlns:p="http://schemas.openxmlformats.org/presentationml/2006/main" xmlns:r="http://schemas.openxmlformats.org/officeDocument/2006/relationships">
+<p:sld xmlns:a="http://schemas.openxmlformats.org/drawingml/2006/main" xmlns:r="http://schemas.openxmlformats.org/officeDocument/2006/relationships" xmlns:p="http://schemas.openxmlformats.org/presentationml/2006/main">
   <p:cSld>
     <p:spTree>
       <p:nvGrpSpPr>
@@ -10028,7 +9522,14 @@
         <p:cNvGrpSpPr/>
         <p:nvPr/>
       </p:nvGrpSpPr>
-      <p:grpSpPr/>
+      <p:grpSpPr>
+        <a:xfrm>
+          <a:off x="0" y="0"/>
+          <a:ext cx="0" cy="0"/>
+          <a:chOff x="0" y="0"/>
+          <a:chExt cx="0" cy="0"/>
+        </a:xfrm>
+      </p:grpSpPr>
       <p:sp>
         <p:nvSpPr>
           <p:cNvPr id="2" name="Rectangle 1"/>
@@ -10071,6 +9572,7 @@
           <a:lstStyle/>
           <a:p>
             <a:pPr algn="ctr"/>
+            <a:endParaRPr/>
           </a:p>
         </p:txBody>
       </p:sp>
@@ -10083,7 +9585,7 @@
           <p:nvPr/>
         </p:nvPicPr>
         <p:blipFill>
-          <a:blip r:embed="rId2"/>
+          <a:blip r:embed="rId3"/>
           <a:stretch>
             <a:fillRect/>
           </a:stretch>
@@ -10147,58 +9649,6 @@
             </a:pPr>
             <a:r>
               <a:t>Strategic roadmap for the commercialization and expansion of Bete</a:t>
-            </a:r>
-          </a:p>
-        </p:txBody>
-      </p:sp>
-      <p:sp>
-        <p:nvSpPr>
-          <p:cNvPr id="5" name="Rounded Rectangle 4"/>
-          <p:cNvSpPr/>
-          <p:nvPr/>
-        </p:nvSpPr>
-        <p:spPr>
-          <a:xfrm>
-            <a:off x="10241280" y="320040"/>
-            <a:ext cx="1280160" cy="384048"/>
-          </a:xfrm>
-          <a:prstGeom prst="roundRect">
-            <a:avLst/>
-          </a:prstGeom>
-          <a:solidFill>
-            <a:srgbClr val="EEF2FF"/>
-          </a:solidFill>
-          <a:ln>
-            <a:noFill/>
-          </a:ln>
-        </p:spPr>
-        <p:style>
-          <a:lnRef idx="1">
-            <a:schemeClr val="accent1"/>
-          </a:lnRef>
-          <a:fillRef idx="3">
-            <a:schemeClr val="accent1"/>
-          </a:fillRef>
-          <a:effectRef idx="2">
-            <a:schemeClr val="accent1"/>
-          </a:effectRef>
-          <a:fontRef idx="minor">
-            <a:schemeClr val="lt1"/>
-          </a:fontRef>
-        </p:style>
-        <p:txBody>
-          <a:bodyPr rtlCol="0" anchor="ctr"/>
-          <a:lstStyle/>
-          <a:p>
-            <a:pPr algn="ctr">
-              <a:defRPr sz="1000" b="1">
-                <a:solidFill>
-                  <a:srgbClr val="0052CC"/>
-                </a:solidFill>
-              </a:defRPr>
-            </a:pPr>
-            <a:r>
-              <a:t>Bete Defense</a:t>
             </a:r>
           </a:p>
         </p:txBody>
@@ -10245,6 +9695,7 @@
           <a:lstStyle/>
           <a:p>
             <a:pPr algn="ctr"/>
+            <a:endParaRPr/>
           </a:p>
         </p:txBody>
       </p:sp>
@@ -10340,6 +9791,7 @@
           <a:lstStyle/>
           <a:p>
             <a:pPr algn="ctr"/>
+            <a:endParaRPr/>
           </a:p>
         </p:txBody>
       </p:sp>
@@ -10435,6 +9887,7 @@
           <a:lstStyle/>
           <a:p>
             <a:pPr algn="ctr"/>
+            <a:endParaRPr/>
           </a:p>
         </p:txBody>
       </p:sp>
@@ -10530,6 +9983,7 @@
           <a:lstStyle/>
           <a:p>
             <a:pPr algn="ctr"/>
+            <a:endParaRPr/>
           </a:p>
         </p:txBody>
       </p:sp>
@@ -10625,6 +10079,7 @@
           <a:lstStyle/>
           <a:p>
             <a:pPr algn="ctr"/>
+            <a:endParaRPr/>
           </a:p>
         </p:txBody>
       </p:sp>
@@ -10720,6 +10175,7 @@
           <a:lstStyle/>
           <a:p>
             <a:pPr algn="ctr"/>
+            <a:endParaRPr/>
           </a:p>
         </p:txBody>
       </p:sp>
@@ -10782,7 +10238,7 @@
 </file>
 
 <file path=ppt/slides/slide18.xml><?xml version="1.0" encoding="utf-8"?>
-<p:sld xmlns:a="http://schemas.openxmlformats.org/drawingml/2006/main" xmlns:p="http://schemas.openxmlformats.org/presentationml/2006/main" xmlns:r="http://schemas.openxmlformats.org/officeDocument/2006/relationships">
+<p:sld xmlns:a="http://schemas.openxmlformats.org/drawingml/2006/main" xmlns:r="http://schemas.openxmlformats.org/officeDocument/2006/relationships" xmlns:p="http://schemas.openxmlformats.org/presentationml/2006/main">
   <p:cSld>
     <p:spTree>
       <p:nvGrpSpPr>
@@ -10790,7 +10246,14 @@
         <p:cNvGrpSpPr/>
         <p:nvPr/>
       </p:nvGrpSpPr>
-      <p:grpSpPr/>
+      <p:grpSpPr>
+        <a:xfrm>
+          <a:off x="0" y="0"/>
+          <a:ext cx="0" cy="0"/>
+          <a:chOff x="0" y="0"/>
+          <a:chExt cx="0" cy="0"/>
+        </a:xfrm>
+      </p:grpSpPr>
       <p:sp>
         <p:nvSpPr>
           <p:cNvPr id="2" name="Rectangle 1"/>
@@ -10833,6 +10296,7 @@
           <a:lstStyle/>
           <a:p>
             <a:pPr algn="ctr"/>
+            <a:endParaRPr/>
           </a:p>
         </p:txBody>
       </p:sp>
@@ -10845,7 +10309,7 @@
           <p:nvPr/>
         </p:nvPicPr>
         <p:blipFill>
-          <a:blip r:embed="rId2"/>
+          <a:blip r:embed="rId3"/>
           <a:stretch>
             <a:fillRect/>
           </a:stretch>
@@ -10909,58 +10373,6 @@
             </a:pPr>
             <a:r>
               <a:t>Synthesizing the engineering and socioeconomic impact of Bete</a:t>
-            </a:r>
-          </a:p>
-        </p:txBody>
-      </p:sp>
-      <p:sp>
-        <p:nvSpPr>
-          <p:cNvPr id="5" name="Rounded Rectangle 4"/>
-          <p:cNvSpPr/>
-          <p:nvPr/>
-        </p:nvSpPr>
-        <p:spPr>
-          <a:xfrm>
-            <a:off x="10241280" y="320040"/>
-            <a:ext cx="1280160" cy="384048"/>
-          </a:xfrm>
-          <a:prstGeom prst="roundRect">
-            <a:avLst/>
-          </a:prstGeom>
-          <a:solidFill>
-            <a:srgbClr val="EEF2FF"/>
-          </a:solidFill>
-          <a:ln>
-            <a:noFill/>
-          </a:ln>
-        </p:spPr>
-        <p:style>
-          <a:lnRef idx="1">
-            <a:schemeClr val="accent1"/>
-          </a:lnRef>
-          <a:fillRef idx="3">
-            <a:schemeClr val="accent1"/>
-          </a:fillRef>
-          <a:effectRef idx="2">
-            <a:schemeClr val="accent1"/>
-          </a:effectRef>
-          <a:fontRef idx="minor">
-            <a:schemeClr val="lt1"/>
-          </a:fontRef>
-        </p:style>
-        <p:txBody>
-          <a:bodyPr rtlCol="0" anchor="ctr"/>
-          <a:lstStyle/>
-          <a:p>
-            <a:pPr algn="ctr">
-              <a:defRPr sz="1000" b="1">
-                <a:solidFill>
-                  <a:srgbClr val="0052CC"/>
-                </a:solidFill>
-              </a:defRPr>
-            </a:pPr>
-            <a:r>
-              <a:t>Bete Defense</a:t>
             </a:r>
           </a:p>
         </p:txBody>
@@ -11007,6 +10419,7 @@
           <a:lstStyle/>
           <a:p>
             <a:pPr algn="ctr"/>
+            <a:endParaRPr/>
           </a:p>
         </p:txBody>
       </p:sp>
@@ -11102,6 +10515,7 @@
           <a:lstStyle/>
           <a:p>
             <a:pPr algn="ctr"/>
+            <a:endParaRPr/>
           </a:p>
         </p:txBody>
       </p:sp>
@@ -11197,6 +10611,7 @@
           <a:lstStyle/>
           <a:p>
             <a:pPr algn="ctr"/>
+            <a:endParaRPr/>
           </a:p>
         </p:txBody>
       </p:sp>
@@ -11292,6 +10707,7 @@
           <a:lstStyle/>
           <a:p>
             <a:pPr algn="ctr"/>
+            <a:endParaRPr/>
           </a:p>
         </p:txBody>
       </p:sp>
@@ -11354,7 +10770,7 @@
 </file>
 
 <file path=ppt/slides/slide19.xml><?xml version="1.0" encoding="utf-8"?>
-<p:sld xmlns:a="http://schemas.openxmlformats.org/drawingml/2006/main" xmlns:p="http://schemas.openxmlformats.org/presentationml/2006/main" xmlns:r="http://schemas.openxmlformats.org/officeDocument/2006/relationships">
+<p:sld xmlns:a="http://schemas.openxmlformats.org/drawingml/2006/main" xmlns:r="http://schemas.openxmlformats.org/officeDocument/2006/relationships" xmlns:p="http://schemas.openxmlformats.org/presentationml/2006/main">
   <p:cSld>
     <p:spTree>
       <p:nvGrpSpPr>
@@ -11362,7 +10778,14 @@
         <p:cNvGrpSpPr/>
         <p:nvPr/>
       </p:nvGrpSpPr>
-      <p:grpSpPr/>
+      <p:grpSpPr>
+        <a:xfrm>
+          <a:off x="0" y="0"/>
+          <a:ext cx="0" cy="0"/>
+          <a:chOff x="0" y="0"/>
+          <a:chExt cx="0" cy="0"/>
+        </a:xfrm>
+      </p:grpSpPr>
       <p:sp>
         <p:nvSpPr>
           <p:cNvPr id="2" name="Rectangle 1"/>
@@ -11403,6 +10826,7 @@
           <a:lstStyle/>
           <a:p>
             <a:pPr algn="ctr"/>
+            <a:endParaRPr/>
           </a:p>
         </p:txBody>
       </p:sp>
@@ -11448,6 +10872,7 @@
           <a:lstStyle/>
           <a:p>
             <a:pPr algn="ctr"/>
+            <a:endParaRPr/>
           </a:p>
         </p:txBody>
       </p:sp>
@@ -11476,13 +10901,6 @@
             <a:br/>
             <a:br/>
             <a:br/>
-            <a:pPr algn="ctr">
-              <a:defRPr sz="3600" b="1">
-                <a:solidFill>
-                  <a:srgbClr val="002B49"/>
-                </a:solidFill>
-              </a:defRPr>
-            </a:pPr>
             <a:r>
               <a:t>Thank You!</a:t>
             </a:r>
@@ -11547,7 +10965,7 @@
           <p:nvPr/>
         </p:nvPicPr>
         <p:blipFill>
-          <a:blip r:embed="rId2"/>
+          <a:blip r:embed="rId3"/>
           <a:stretch>
             <a:fillRect/>
           </a:stretch>
@@ -11571,7 +10989,7 @@
 </file>
 
 <file path=ppt/slides/slide2.xml><?xml version="1.0" encoding="utf-8"?>
-<p:sld xmlns:a="http://schemas.openxmlformats.org/drawingml/2006/main" xmlns:p="http://schemas.openxmlformats.org/presentationml/2006/main" xmlns:r="http://schemas.openxmlformats.org/officeDocument/2006/relationships">
+<p:sld xmlns:a="http://schemas.openxmlformats.org/drawingml/2006/main" xmlns:r="http://schemas.openxmlformats.org/officeDocument/2006/relationships" xmlns:p="http://schemas.openxmlformats.org/presentationml/2006/main">
   <p:cSld>
     <p:spTree>
       <p:nvGrpSpPr>
@@ -11579,7 +10997,14 @@
         <p:cNvGrpSpPr/>
         <p:nvPr/>
       </p:nvGrpSpPr>
-      <p:grpSpPr/>
+      <p:grpSpPr>
+        <a:xfrm>
+          <a:off x="0" y="0"/>
+          <a:ext cx="0" cy="0"/>
+          <a:chOff x="0" y="0"/>
+          <a:chExt cx="0" cy="0"/>
+        </a:xfrm>
+      </p:grpSpPr>
       <p:sp>
         <p:nvSpPr>
           <p:cNvPr id="2" name="Rectangle 1"/>
@@ -11622,6 +11047,7 @@
           <a:lstStyle/>
           <a:p>
             <a:pPr algn="ctr"/>
+            <a:endParaRPr/>
           </a:p>
         </p:txBody>
       </p:sp>
@@ -11634,7 +11060,7 @@
           <p:nvPr/>
         </p:nvPicPr>
         <p:blipFill>
-          <a:blip r:embed="rId2"/>
+          <a:blip r:embed="rId3"/>
           <a:stretch>
             <a:fillRect/>
           </a:stretch>
@@ -11698,58 +11124,6 @@
             </a:pPr>
             <a:r>
               <a:t>What is Bete and background of the project</a:t>
-            </a:r>
-          </a:p>
-        </p:txBody>
-      </p:sp>
-      <p:sp>
-        <p:nvSpPr>
-          <p:cNvPr id="5" name="Rounded Rectangle 4"/>
-          <p:cNvSpPr/>
-          <p:nvPr/>
-        </p:nvSpPr>
-        <p:spPr>
-          <a:xfrm>
-            <a:off x="10241280" y="320040"/>
-            <a:ext cx="1280160" cy="384048"/>
-          </a:xfrm>
-          <a:prstGeom prst="roundRect">
-            <a:avLst/>
-          </a:prstGeom>
-          <a:solidFill>
-            <a:srgbClr val="EEF2FF"/>
-          </a:solidFill>
-          <a:ln>
-            <a:noFill/>
-          </a:ln>
-        </p:spPr>
-        <p:style>
-          <a:lnRef idx="1">
-            <a:schemeClr val="accent1"/>
-          </a:lnRef>
-          <a:fillRef idx="3">
-            <a:schemeClr val="accent1"/>
-          </a:fillRef>
-          <a:effectRef idx="2">
-            <a:schemeClr val="accent1"/>
-          </a:effectRef>
-          <a:fontRef idx="minor">
-            <a:schemeClr val="lt1"/>
-          </a:fontRef>
-        </p:style>
-        <p:txBody>
-          <a:bodyPr rtlCol="0" anchor="ctr"/>
-          <a:lstStyle/>
-          <a:p>
-            <a:pPr algn="ctr">
-              <a:defRPr sz="1000" b="1">
-                <a:solidFill>
-                  <a:srgbClr val="0052CC"/>
-                </a:solidFill>
-              </a:defRPr>
-            </a:pPr>
-            <a:r>
-              <a:t>Bete Defense</a:t>
             </a:r>
           </a:p>
         </p:txBody>
@@ -11796,6 +11170,7 @@
           <a:lstStyle/>
           <a:p>
             <a:pPr algn="ctr"/>
+            <a:endParaRPr/>
           </a:p>
         </p:txBody>
       </p:sp>
@@ -11921,6 +11296,7 @@
           <a:lstStyle/>
           <a:p>
             <a:pPr algn="ctr"/>
+            <a:endParaRPr/>
           </a:p>
         </p:txBody>
       </p:sp>
@@ -12028,7 +11404,7 @@
 </file>
 
 <file path=ppt/slides/slide3.xml><?xml version="1.0" encoding="utf-8"?>
-<p:sld xmlns:a="http://schemas.openxmlformats.org/drawingml/2006/main" xmlns:p="http://schemas.openxmlformats.org/presentationml/2006/main" xmlns:r="http://schemas.openxmlformats.org/officeDocument/2006/relationships">
+<p:sld xmlns:a="http://schemas.openxmlformats.org/drawingml/2006/main" xmlns:r="http://schemas.openxmlformats.org/officeDocument/2006/relationships" xmlns:p="http://schemas.openxmlformats.org/presentationml/2006/main">
   <p:cSld>
     <p:spTree>
       <p:nvGrpSpPr>
@@ -12036,7 +11412,14 @@
         <p:cNvGrpSpPr/>
         <p:nvPr/>
       </p:nvGrpSpPr>
-      <p:grpSpPr/>
+      <p:grpSpPr>
+        <a:xfrm>
+          <a:off x="0" y="0"/>
+          <a:ext cx="0" cy="0"/>
+          <a:chOff x="0" y="0"/>
+          <a:chExt cx="0" cy="0"/>
+        </a:xfrm>
+      </p:grpSpPr>
       <p:sp>
         <p:nvSpPr>
           <p:cNvPr id="2" name="Rectangle 1"/>
@@ -12079,6 +11462,7 @@
           <a:lstStyle/>
           <a:p>
             <a:pPr algn="ctr"/>
+            <a:endParaRPr/>
           </a:p>
         </p:txBody>
       </p:sp>
@@ -12091,7 +11475,7 @@
           <p:nvPr/>
         </p:nvPicPr>
         <p:blipFill>
-          <a:blip r:embed="rId2"/>
+          <a:blip r:embed="rId3"/>
           <a:stretch>
             <a:fillRect/>
           </a:stretch>
@@ -12155,58 +11539,6 @@
             </a:pPr>
             <a:r>
               <a:t>Four primary structural barriers in the current traditional repair market</a:t>
-            </a:r>
-          </a:p>
-        </p:txBody>
-      </p:sp>
-      <p:sp>
-        <p:nvSpPr>
-          <p:cNvPr id="5" name="Rounded Rectangle 4"/>
-          <p:cNvSpPr/>
-          <p:nvPr/>
-        </p:nvSpPr>
-        <p:spPr>
-          <a:xfrm>
-            <a:off x="10241280" y="320040"/>
-            <a:ext cx="1280160" cy="384048"/>
-          </a:xfrm>
-          <a:prstGeom prst="roundRect">
-            <a:avLst/>
-          </a:prstGeom>
-          <a:solidFill>
-            <a:srgbClr val="EEF2FF"/>
-          </a:solidFill>
-          <a:ln>
-            <a:noFill/>
-          </a:ln>
-        </p:spPr>
-        <p:style>
-          <a:lnRef idx="1">
-            <a:schemeClr val="accent1"/>
-          </a:lnRef>
-          <a:fillRef idx="3">
-            <a:schemeClr val="accent1"/>
-          </a:fillRef>
-          <a:effectRef idx="2">
-            <a:schemeClr val="accent1"/>
-          </a:effectRef>
-          <a:fontRef idx="minor">
-            <a:schemeClr val="lt1"/>
-          </a:fontRef>
-        </p:style>
-        <p:txBody>
-          <a:bodyPr rtlCol="0" anchor="ctr"/>
-          <a:lstStyle/>
-          <a:p>
-            <a:pPr algn="ctr">
-              <a:defRPr sz="1000" b="1">
-                <a:solidFill>
-                  <a:srgbClr val="0052CC"/>
-                </a:solidFill>
-              </a:defRPr>
-            </a:pPr>
-            <a:r>
-              <a:t>Bete Defense</a:t>
             </a:r>
           </a:p>
         </p:txBody>
@@ -12253,6 +11585,7 @@
           <a:lstStyle/>
           <a:p>
             <a:pPr algn="ctr"/>
+            <a:endParaRPr/>
           </a:p>
         </p:txBody>
       </p:sp>
@@ -12265,7 +11598,7 @@
         <p:spPr>
           <a:xfrm>
             <a:off x="960120" y="1554480"/>
-            <a:ext cx="4800600" cy="1874519"/>
+            <a:ext cx="4800600" cy="1246495"/>
           </a:xfrm>
           <a:prstGeom prst="rect">
             <a:avLst/>
@@ -12286,53 +11619,49 @@
               </a:defRPr>
             </a:pPr>
             <a:r>
-              <a:t>🚨  Difficulty Finding Trusted Technicians</a:t>
-            </a:r>
-          </a:p>
-          <a:p>
-            <a:pPr>
-              <a:spcBef>
-                <a:spcPts val="400"/>
-              </a:spcBef>
-              <a:defRPr sz="1100">
+              <a:rPr dirty="0"/>
+              <a:t>🚨  </a:t>
+            </a:r>
+            <a:r>
+              <a:rPr lang="en-US" b="1" i="0" dirty="0">
                 <a:solidFill>
                   <a:srgbClr val="0F172A"/>
                 </a:solidFill>
-              </a:defRPr>
-            </a:pPr>
-            <a:r>
-              <a:t>• Zero formal background checks or identity vetting on informal artisans</a:t>
-            </a:r>
-          </a:p>
-          <a:p>
-            <a:pPr>
-              <a:spcBef>
-                <a:spcPts val="400"/>
-              </a:spcBef>
-              <a:defRPr sz="1100">
-                <a:solidFill>
-                  <a:srgbClr val="0F172A"/>
-                </a:solidFill>
-              </a:defRPr>
-            </a:pPr>
-            <a:r>
-              <a:t>• Homeowners face security and theft concerns when admitting strangers into private homes</a:t>
-            </a:r>
-          </a:p>
-          <a:p>
-            <a:pPr>
-              <a:spcBef>
-                <a:spcPts val="400"/>
-              </a:spcBef>
-              <a:defRPr sz="1100">
-                <a:solidFill>
-                  <a:srgbClr val="0F172A"/>
-                </a:solidFill>
-              </a:defRPr>
-            </a:pPr>
-            <a:r>
-              <a:t>• Lack of verified reviews or quality records for technicians</a:t>
-            </a:r>
+                <a:effectLst/>
+                <a:latin typeface="Plus Jakarta Sans"/>
+              </a:rPr>
+              <a:t>1. Difficulty Finding Trusted Technicians</a:t>
+            </a:r>
+          </a:p>
+          <a:p>
+            <a:pPr>
+              <a:defRPr sz="1500" b="1">
+                <a:solidFill>
+                  <a:srgbClr val="002B49"/>
+                </a:solidFill>
+              </a:defRPr>
+            </a:pPr>
+            <a:endParaRPr lang="en-US" dirty="0"/>
+          </a:p>
+          <a:p>
+            <a:pPr>
+              <a:defRPr sz="1500" b="1">
+                <a:solidFill>
+                  <a:srgbClr val="002B49"/>
+                </a:solidFill>
+              </a:defRPr>
+            </a:pPr>
+            <a:r>
+              <a:rPr lang="en-US" b="0" i="0" dirty="0">
+                <a:solidFill>
+                  <a:srgbClr val="475569"/>
+                </a:solidFill>
+                <a:effectLst/>
+                <a:latin typeface="Plus Jakarta Sans"/>
+              </a:rPr>
+              <a:t>Homeowners struggle to find reliable, vetted handymen promptly during emergencies. Informal networks offer zero background checks or skill verification.</a:t>
+            </a:r>
+            <a:endParaRPr dirty="0"/>
           </a:p>
         </p:txBody>
       </p:sp>
@@ -12378,6 +11707,7 @@
           <a:lstStyle/>
           <a:p>
             <a:pPr algn="ctr"/>
+            <a:endParaRPr/>
           </a:p>
         </p:txBody>
       </p:sp>
@@ -12503,6 +11833,7 @@
           <a:lstStyle/>
           <a:p>
             <a:pPr algn="ctr"/>
+            <a:endParaRPr/>
           </a:p>
         </p:txBody>
       </p:sp>
@@ -12628,6 +11959,7 @@
           <a:lstStyle/>
           <a:p>
             <a:pPr algn="ctr"/>
+            <a:endParaRPr/>
           </a:p>
         </p:txBody>
       </p:sp>
@@ -12720,7 +12052,7 @@
 </file>
 
 <file path=ppt/slides/slide4.xml><?xml version="1.0" encoding="utf-8"?>
-<p:sld xmlns:a="http://schemas.openxmlformats.org/drawingml/2006/main" xmlns:p="http://schemas.openxmlformats.org/presentationml/2006/main" xmlns:r="http://schemas.openxmlformats.org/officeDocument/2006/relationships">
+<p:sld xmlns:a="http://schemas.openxmlformats.org/drawingml/2006/main" xmlns:r="http://schemas.openxmlformats.org/officeDocument/2006/relationships" xmlns:p="http://schemas.openxmlformats.org/presentationml/2006/main">
   <p:cSld>
     <p:spTree>
       <p:nvGrpSpPr>
@@ -12728,7 +12060,14 @@
         <p:cNvGrpSpPr/>
         <p:nvPr/>
       </p:nvGrpSpPr>
-      <p:grpSpPr/>
+      <p:grpSpPr>
+        <a:xfrm>
+          <a:off x="0" y="0"/>
+          <a:ext cx="0" cy="0"/>
+          <a:chOff x="0" y="0"/>
+          <a:chExt cx="0" cy="0"/>
+        </a:xfrm>
+      </p:grpSpPr>
       <p:sp>
         <p:nvSpPr>
           <p:cNvPr id="2" name="Rectangle 1"/>
@@ -12771,6 +12110,7 @@
           <a:lstStyle/>
           <a:p>
             <a:pPr algn="ctr"/>
+            <a:endParaRPr/>
           </a:p>
         </p:txBody>
       </p:sp>
@@ -12783,7 +12123,7 @@
           <p:nvPr/>
         </p:nvPicPr>
         <p:blipFill>
-          <a:blip r:embed="rId2"/>
+          <a:blip r:embed="rId3"/>
           <a:stretch>
             <a:fillRect/>
           </a:stretch>
@@ -12847,58 +12187,6 @@
             </a:pPr>
             <a:r>
               <a:t>Defining the overall mission and specific engineering targets of Bete</a:t>
-            </a:r>
-          </a:p>
-        </p:txBody>
-      </p:sp>
-      <p:sp>
-        <p:nvSpPr>
-          <p:cNvPr id="5" name="Rounded Rectangle 4"/>
-          <p:cNvSpPr/>
-          <p:nvPr/>
-        </p:nvSpPr>
-        <p:spPr>
-          <a:xfrm>
-            <a:off x="10241280" y="320040"/>
-            <a:ext cx="1280160" cy="384048"/>
-          </a:xfrm>
-          <a:prstGeom prst="roundRect">
-            <a:avLst/>
-          </a:prstGeom>
-          <a:solidFill>
-            <a:srgbClr val="EEF2FF"/>
-          </a:solidFill>
-          <a:ln>
-            <a:noFill/>
-          </a:ln>
-        </p:spPr>
-        <p:style>
-          <a:lnRef idx="1">
-            <a:schemeClr val="accent1"/>
-          </a:lnRef>
-          <a:fillRef idx="3">
-            <a:schemeClr val="accent1"/>
-          </a:fillRef>
-          <a:effectRef idx="2">
-            <a:schemeClr val="accent1"/>
-          </a:effectRef>
-          <a:fontRef idx="minor">
-            <a:schemeClr val="lt1"/>
-          </a:fontRef>
-        </p:style>
-        <p:txBody>
-          <a:bodyPr rtlCol="0" anchor="ctr"/>
-          <a:lstStyle/>
-          <a:p>
-            <a:pPr algn="ctr">
-              <a:defRPr sz="1000" b="1">
-                <a:solidFill>
-                  <a:srgbClr val="0052CC"/>
-                </a:solidFill>
-              </a:defRPr>
-            </a:pPr>
-            <a:r>
-              <a:t>Bete Defense</a:t>
             </a:r>
           </a:p>
         </p:txBody>
@@ -12945,6 +12233,7 @@
           <a:lstStyle/>
           <a:p>
             <a:pPr algn="ctr"/>
+            <a:endParaRPr/>
           </a:p>
         </p:txBody>
       </p:sp>
@@ -13040,6 +12329,7 @@
           <a:lstStyle/>
           <a:p>
             <a:pPr algn="ctr"/>
+            <a:endParaRPr/>
           </a:p>
         </p:txBody>
       </p:sp>
@@ -13165,6 +12455,7 @@
           <a:lstStyle/>
           <a:p>
             <a:pPr algn="ctr"/>
+            <a:endParaRPr/>
           </a:p>
         </p:txBody>
       </p:sp>
@@ -13290,6 +12581,7 @@
           <a:lstStyle/>
           <a:p>
             <a:pPr algn="ctr"/>
+            <a:endParaRPr/>
           </a:p>
         </p:txBody>
       </p:sp>
@@ -13382,7 +12674,7 @@
 </file>
 
 <file path=ppt/slides/slide5.xml><?xml version="1.0" encoding="utf-8"?>
-<p:sld xmlns:a="http://schemas.openxmlformats.org/drawingml/2006/main" xmlns:p="http://schemas.openxmlformats.org/presentationml/2006/main" xmlns:r="http://schemas.openxmlformats.org/officeDocument/2006/relationships">
+<p:sld xmlns:a="http://schemas.openxmlformats.org/drawingml/2006/main" xmlns:r="http://schemas.openxmlformats.org/officeDocument/2006/relationships" xmlns:p="http://schemas.openxmlformats.org/presentationml/2006/main">
   <p:cSld>
     <p:spTree>
       <p:nvGrpSpPr>
@@ -13390,7 +12682,14 @@
         <p:cNvGrpSpPr/>
         <p:nvPr/>
       </p:nvGrpSpPr>
-      <p:grpSpPr/>
+      <p:grpSpPr>
+        <a:xfrm>
+          <a:off x="0" y="0"/>
+          <a:ext cx="0" cy="0"/>
+          <a:chOff x="0" y="0"/>
+          <a:chExt cx="0" cy="0"/>
+        </a:xfrm>
+      </p:grpSpPr>
       <p:sp>
         <p:nvSpPr>
           <p:cNvPr id="2" name="Rectangle 1"/>
@@ -13433,6 +12732,7 @@
           <a:lstStyle/>
           <a:p>
             <a:pPr algn="ctr"/>
+            <a:endParaRPr/>
           </a:p>
         </p:txBody>
       </p:sp>
@@ -13445,7 +12745,7 @@
           <p:nvPr/>
         </p:nvPicPr>
         <p:blipFill>
-          <a:blip r:embed="rId2"/>
+          <a:blip r:embed="rId3"/>
           <a:stretch>
             <a:fillRect/>
           </a:stretch>
@@ -13509,58 +12809,6 @@
             </a:pPr>
             <a:r>
               <a:t>How Bete addresses each traditional repair challenge systematically</a:t>
-            </a:r>
-          </a:p>
-        </p:txBody>
-      </p:sp>
-      <p:sp>
-        <p:nvSpPr>
-          <p:cNvPr id="5" name="Rounded Rectangle 4"/>
-          <p:cNvSpPr/>
-          <p:nvPr/>
-        </p:nvSpPr>
-        <p:spPr>
-          <a:xfrm>
-            <a:off x="10241280" y="320040"/>
-            <a:ext cx="1280160" cy="384048"/>
-          </a:xfrm>
-          <a:prstGeom prst="roundRect">
-            <a:avLst/>
-          </a:prstGeom>
-          <a:solidFill>
-            <a:srgbClr val="EEF2FF"/>
-          </a:solidFill>
-          <a:ln>
-            <a:noFill/>
-          </a:ln>
-        </p:spPr>
-        <p:style>
-          <a:lnRef idx="1">
-            <a:schemeClr val="accent1"/>
-          </a:lnRef>
-          <a:fillRef idx="3">
-            <a:schemeClr val="accent1"/>
-          </a:fillRef>
-          <a:effectRef idx="2">
-            <a:schemeClr val="accent1"/>
-          </a:effectRef>
-          <a:fontRef idx="minor">
-            <a:schemeClr val="lt1"/>
-          </a:fontRef>
-        </p:style>
-        <p:txBody>
-          <a:bodyPr rtlCol="0" anchor="ctr"/>
-          <a:lstStyle/>
-          <a:p>
-            <a:pPr algn="ctr">
-              <a:defRPr sz="1000" b="1">
-                <a:solidFill>
-                  <a:srgbClr val="0052CC"/>
-                </a:solidFill>
-              </a:defRPr>
-            </a:pPr>
-            <a:r>
-              <a:t>Bete Defense</a:t>
             </a:r>
           </a:p>
         </p:txBody>
@@ -13607,6 +12855,7 @@
           <a:lstStyle/>
           <a:p>
             <a:pPr algn="ctr"/>
+            <a:endParaRPr/>
           </a:p>
         </p:txBody>
       </p:sp>
@@ -13640,6 +12889,7 @@
               </a:defRPr>
             </a:pPr>
             <a:r>
+              <a:rPr dirty="0"/>
               <a:t>📡  Instant Broadcasting</a:t>
             </a:r>
           </a:p>
@@ -13655,7 +12905,16 @@
               </a:defRPr>
             </a:pPr>
             <a:r>
-              <a:t>Customers post issue details, photos, and subcity location in under 2 minutes. The job is instantly dispatched to matching technicians.</a:t>
+              <a:rPr dirty="0"/>
+              <a:t>Customers post issue details, photos, and </a:t>
+            </a:r>
+            <a:r>
+              <a:rPr dirty="0" err="1"/>
+              <a:t>subcity</a:t>
+            </a:r>
+            <a:r>
+              <a:rPr dirty="0"/>
+              <a:t> location in under 2 minutes. The job is instantly dispatched to matching technicians.</a:t>
             </a:r>
           </a:p>
         </p:txBody>
@@ -13702,6 +12961,7 @@
           <a:lstStyle/>
           <a:p>
             <a:pPr algn="ctr"/>
+            <a:endParaRPr/>
           </a:p>
         </p:txBody>
       </p:sp>
@@ -13797,6 +13057,7 @@
           <a:lstStyle/>
           <a:p>
             <a:pPr algn="ctr"/>
+            <a:endParaRPr/>
           </a:p>
         </p:txBody>
       </p:sp>
@@ -13892,6 +13153,7 @@
           <a:lstStyle/>
           <a:p>
             <a:pPr algn="ctr"/>
+            <a:endParaRPr/>
           </a:p>
         </p:txBody>
       </p:sp>
@@ -13954,7 +13216,7 @@
 </file>
 
 <file path=ppt/slides/slide6.xml><?xml version="1.0" encoding="utf-8"?>
-<p:sld xmlns:a="http://schemas.openxmlformats.org/drawingml/2006/main" xmlns:p="http://schemas.openxmlformats.org/presentationml/2006/main" xmlns:r="http://schemas.openxmlformats.org/officeDocument/2006/relationships">
+<p:sld xmlns:a="http://schemas.openxmlformats.org/drawingml/2006/main" xmlns:r="http://schemas.openxmlformats.org/officeDocument/2006/relationships" xmlns:p="http://schemas.openxmlformats.org/presentationml/2006/main">
   <p:cSld>
     <p:spTree>
       <p:nvGrpSpPr>
@@ -13962,7 +13224,14 @@
         <p:cNvGrpSpPr/>
         <p:nvPr/>
       </p:nvGrpSpPr>
-      <p:grpSpPr/>
+      <p:grpSpPr>
+        <a:xfrm>
+          <a:off x="0" y="0"/>
+          <a:ext cx="0" cy="0"/>
+          <a:chOff x="0" y="0"/>
+          <a:chExt cx="0" cy="0"/>
+        </a:xfrm>
+      </p:grpSpPr>
       <p:sp>
         <p:nvSpPr>
           <p:cNvPr id="2" name="Rectangle 1"/>
@@ -14005,6 +13274,7 @@
           <a:lstStyle/>
           <a:p>
             <a:pPr algn="ctr"/>
+            <a:endParaRPr/>
           </a:p>
         </p:txBody>
       </p:sp>
@@ -14017,7 +13287,7 @@
           <p:nvPr/>
         </p:nvPicPr>
         <p:blipFill>
-          <a:blip r:embed="rId2"/>
+          <a:blip r:embed="rId3"/>
           <a:stretch>
             <a:fillRect/>
           </a:stretch>
@@ -14081,58 +13351,6 @@
             </a:pPr>
             <a:r>
               <a:t>Three primary roles interacting within the Bete digital ecosystem</a:t>
-            </a:r>
-          </a:p>
-        </p:txBody>
-      </p:sp>
-      <p:sp>
-        <p:nvSpPr>
-          <p:cNvPr id="5" name="Rounded Rectangle 4"/>
-          <p:cNvSpPr/>
-          <p:nvPr/>
-        </p:nvSpPr>
-        <p:spPr>
-          <a:xfrm>
-            <a:off x="10241280" y="320040"/>
-            <a:ext cx="1280160" cy="384048"/>
-          </a:xfrm>
-          <a:prstGeom prst="roundRect">
-            <a:avLst/>
-          </a:prstGeom>
-          <a:solidFill>
-            <a:srgbClr val="EEF2FF"/>
-          </a:solidFill>
-          <a:ln>
-            <a:noFill/>
-          </a:ln>
-        </p:spPr>
-        <p:style>
-          <a:lnRef idx="1">
-            <a:schemeClr val="accent1"/>
-          </a:lnRef>
-          <a:fillRef idx="3">
-            <a:schemeClr val="accent1"/>
-          </a:fillRef>
-          <a:effectRef idx="2">
-            <a:schemeClr val="accent1"/>
-          </a:effectRef>
-          <a:fontRef idx="minor">
-            <a:schemeClr val="lt1"/>
-          </a:fontRef>
-        </p:style>
-        <p:txBody>
-          <a:bodyPr rtlCol="0" anchor="ctr"/>
-          <a:lstStyle/>
-          <a:p>
-            <a:pPr algn="ctr">
-              <a:defRPr sz="1000" b="1">
-                <a:solidFill>
-                  <a:srgbClr val="0052CC"/>
-                </a:solidFill>
-              </a:defRPr>
-            </a:pPr>
-            <a:r>
-              <a:t>Bete Defense</a:t>
             </a:r>
           </a:p>
         </p:txBody>
@@ -14179,6 +13397,7 @@
           <a:lstStyle/>
           <a:p>
             <a:pPr algn="ctr"/>
+            <a:endParaRPr/>
           </a:p>
         </p:txBody>
       </p:sp>
@@ -14334,6 +13553,7 @@
           <a:lstStyle/>
           <a:p>
             <a:pPr algn="ctr"/>
+            <a:endParaRPr/>
           </a:p>
         </p:txBody>
       </p:sp>
@@ -14489,6 +13709,7 @@
           <a:lstStyle/>
           <a:p>
             <a:pPr algn="ctr"/>
+            <a:endParaRPr/>
           </a:p>
         </p:txBody>
       </p:sp>
@@ -14611,7 +13832,7 @@
 </file>
 
 <file path=ppt/slides/slide7.xml><?xml version="1.0" encoding="utf-8"?>
-<p:sld xmlns:a="http://schemas.openxmlformats.org/drawingml/2006/main" xmlns:p="http://schemas.openxmlformats.org/presentationml/2006/main" xmlns:r="http://schemas.openxmlformats.org/officeDocument/2006/relationships">
+<p:sld xmlns:a="http://schemas.openxmlformats.org/drawingml/2006/main" xmlns:r="http://schemas.openxmlformats.org/officeDocument/2006/relationships" xmlns:p="http://schemas.openxmlformats.org/presentationml/2006/main">
   <p:cSld>
     <p:spTree>
       <p:nvGrpSpPr>
@@ -14619,7 +13840,14 @@
         <p:cNvGrpSpPr/>
         <p:nvPr/>
       </p:nvGrpSpPr>
-      <p:grpSpPr/>
+      <p:grpSpPr>
+        <a:xfrm>
+          <a:off x="0" y="0"/>
+          <a:ext cx="0" cy="0"/>
+          <a:chOff x="0" y="0"/>
+          <a:chExt cx="0" cy="0"/>
+        </a:xfrm>
+      </p:grpSpPr>
       <p:sp>
         <p:nvSpPr>
           <p:cNvPr id="2" name="Rectangle 1"/>
@@ -14662,6 +13890,7 @@
           <a:lstStyle/>
           <a:p>
             <a:pPr algn="ctr"/>
+            <a:endParaRPr/>
           </a:p>
         </p:txBody>
       </p:sp>
@@ -14674,7 +13903,7 @@
           <p:nvPr/>
         </p:nvPicPr>
         <p:blipFill>
-          <a:blip r:embed="rId2"/>
+          <a:blip r:embed="rId3"/>
           <a:stretch>
             <a:fillRect/>
           </a:stretch>
@@ -14738,58 +13967,6 @@
             </a:pPr>
             <a:r>
               <a:t>Core capabilities delivered across the mobile platform</a:t>
-            </a:r>
-          </a:p>
-        </p:txBody>
-      </p:sp>
-      <p:sp>
-        <p:nvSpPr>
-          <p:cNvPr id="5" name="Rounded Rectangle 4"/>
-          <p:cNvSpPr/>
-          <p:nvPr/>
-        </p:nvSpPr>
-        <p:spPr>
-          <a:xfrm>
-            <a:off x="10241280" y="320040"/>
-            <a:ext cx="1280160" cy="384048"/>
-          </a:xfrm>
-          <a:prstGeom prst="roundRect">
-            <a:avLst/>
-          </a:prstGeom>
-          <a:solidFill>
-            <a:srgbClr val="EEF2FF"/>
-          </a:solidFill>
-          <a:ln>
-            <a:noFill/>
-          </a:ln>
-        </p:spPr>
-        <p:style>
-          <a:lnRef idx="1">
-            <a:schemeClr val="accent1"/>
-          </a:lnRef>
-          <a:fillRef idx="3">
-            <a:schemeClr val="accent1"/>
-          </a:fillRef>
-          <a:effectRef idx="2">
-            <a:schemeClr val="accent1"/>
-          </a:effectRef>
-          <a:fontRef idx="minor">
-            <a:schemeClr val="lt1"/>
-          </a:fontRef>
-        </p:style>
-        <p:txBody>
-          <a:bodyPr rtlCol="0" anchor="ctr"/>
-          <a:lstStyle/>
-          <a:p>
-            <a:pPr algn="ctr">
-              <a:defRPr sz="1000" b="1">
-                <a:solidFill>
-                  <a:srgbClr val="0052CC"/>
-                </a:solidFill>
-              </a:defRPr>
-            </a:pPr>
-            <a:r>
-              <a:t>Bete Defense</a:t>
             </a:r>
           </a:p>
         </p:txBody>
@@ -14836,6 +14013,7 @@
           <a:lstStyle/>
           <a:p>
             <a:pPr algn="ctr"/>
+            <a:endParaRPr/>
           </a:p>
         </p:txBody>
       </p:sp>
@@ -14931,6 +14109,7 @@
           <a:lstStyle/>
           <a:p>
             <a:pPr algn="ctr"/>
+            <a:endParaRPr/>
           </a:p>
         </p:txBody>
       </p:sp>
@@ -15026,6 +14205,7 @@
           <a:lstStyle/>
           <a:p>
             <a:pPr algn="ctr"/>
+            <a:endParaRPr/>
           </a:p>
         </p:txBody>
       </p:sp>
@@ -15121,6 +14301,7 @@
           <a:lstStyle/>
           <a:p>
             <a:pPr algn="ctr"/>
+            <a:endParaRPr/>
           </a:p>
         </p:txBody>
       </p:sp>
@@ -15216,6 +14397,7 @@
           <a:lstStyle/>
           <a:p>
             <a:pPr algn="ctr"/>
+            <a:endParaRPr/>
           </a:p>
         </p:txBody>
       </p:sp>
@@ -15311,6 +14493,7 @@
           <a:lstStyle/>
           <a:p>
             <a:pPr algn="ctr"/>
+            <a:endParaRPr/>
           </a:p>
         </p:txBody>
       </p:sp>
@@ -15406,6 +14589,7 @@
           <a:lstStyle/>
           <a:p>
             <a:pPr algn="ctr"/>
+            <a:endParaRPr/>
           </a:p>
         </p:txBody>
       </p:sp>
@@ -15501,6 +14685,7 @@
           <a:lstStyle/>
           <a:p>
             <a:pPr algn="ctr"/>
+            <a:endParaRPr/>
           </a:p>
         </p:txBody>
       </p:sp>
@@ -15563,7 +14748,7 @@
 </file>
 
 <file path=ppt/slides/slide8.xml><?xml version="1.0" encoding="utf-8"?>
-<p:sld xmlns:a="http://schemas.openxmlformats.org/drawingml/2006/main" xmlns:p="http://schemas.openxmlformats.org/presentationml/2006/main" xmlns:r="http://schemas.openxmlformats.org/officeDocument/2006/relationships">
+<p:sld xmlns:a="http://schemas.openxmlformats.org/drawingml/2006/main" xmlns:r="http://schemas.openxmlformats.org/officeDocument/2006/relationships" xmlns:p="http://schemas.openxmlformats.org/presentationml/2006/main">
   <p:cSld>
     <p:spTree>
       <p:nvGrpSpPr>
@@ -15571,7 +14756,14 @@
         <p:cNvGrpSpPr/>
         <p:nvPr/>
       </p:nvGrpSpPr>
-      <p:grpSpPr/>
+      <p:grpSpPr>
+        <a:xfrm>
+          <a:off x="0" y="0"/>
+          <a:ext cx="0" cy="0"/>
+          <a:chOff x="0" y="0"/>
+          <a:chExt cx="0" cy="0"/>
+        </a:xfrm>
+      </p:grpSpPr>
       <p:sp>
         <p:nvSpPr>
           <p:cNvPr id="2" name="Rectangle 1"/>
@@ -15614,6 +14806,7 @@
           <a:lstStyle/>
           <a:p>
             <a:pPr algn="ctr"/>
+            <a:endParaRPr/>
           </a:p>
         </p:txBody>
       </p:sp>
@@ -15626,7 +14819,7 @@
           <p:nvPr/>
         </p:nvPicPr>
         <p:blipFill>
-          <a:blip r:embed="rId2"/>
+          <a:blip r:embed="rId3"/>
           <a:stretch>
             <a:fillRect/>
           </a:stretch>
@@ -15690,58 +14883,6 @@
             </a:pPr>
             <a:r>
               <a:t>Step-by-step lifecycle from request posting to completed repair</a:t>
-            </a:r>
-          </a:p>
-        </p:txBody>
-      </p:sp>
-      <p:sp>
-        <p:nvSpPr>
-          <p:cNvPr id="5" name="Rounded Rectangle 4"/>
-          <p:cNvSpPr/>
-          <p:nvPr/>
-        </p:nvSpPr>
-        <p:spPr>
-          <a:xfrm>
-            <a:off x="10241280" y="320040"/>
-            <a:ext cx="1280160" cy="384048"/>
-          </a:xfrm>
-          <a:prstGeom prst="roundRect">
-            <a:avLst/>
-          </a:prstGeom>
-          <a:solidFill>
-            <a:srgbClr val="EEF2FF"/>
-          </a:solidFill>
-          <a:ln>
-            <a:noFill/>
-          </a:ln>
-        </p:spPr>
-        <p:style>
-          <a:lnRef idx="1">
-            <a:schemeClr val="accent1"/>
-          </a:lnRef>
-          <a:fillRef idx="3">
-            <a:schemeClr val="accent1"/>
-          </a:fillRef>
-          <a:effectRef idx="2">
-            <a:schemeClr val="accent1"/>
-          </a:effectRef>
-          <a:fontRef idx="minor">
-            <a:schemeClr val="lt1"/>
-          </a:fontRef>
-        </p:style>
-        <p:txBody>
-          <a:bodyPr rtlCol="0" anchor="ctr"/>
-          <a:lstStyle/>
-          <a:p>
-            <a:pPr algn="ctr">
-              <a:defRPr sz="1000" b="1">
-                <a:solidFill>
-                  <a:srgbClr val="0052CC"/>
-                </a:solidFill>
-              </a:defRPr>
-            </a:pPr>
-            <a:r>
-              <a:t>Bete Defense</a:t>
             </a:r>
           </a:p>
         </p:txBody>
@@ -15788,6 +14929,7 @@
           <a:lstStyle/>
           <a:p>
             <a:pPr algn="ctr"/>
+            <a:endParaRPr/>
           </a:p>
         </p:txBody>
       </p:sp>
@@ -15898,6 +15040,7 @@
           <a:lstStyle/>
           <a:p>
             <a:pPr algn="ctr"/>
+            <a:endParaRPr/>
           </a:p>
         </p:txBody>
       </p:sp>
@@ -16008,6 +15151,7 @@
           <a:lstStyle/>
           <a:p>
             <a:pPr algn="ctr"/>
+            <a:endParaRPr/>
           </a:p>
         </p:txBody>
       </p:sp>
@@ -16118,6 +15262,7 @@
           <a:lstStyle/>
           <a:p>
             <a:pPr algn="ctr"/>
+            <a:endParaRPr/>
           </a:p>
         </p:txBody>
       </p:sp>
@@ -16228,6 +15373,7 @@
           <a:lstStyle/>
           <a:p>
             <a:pPr algn="ctr"/>
+            <a:endParaRPr/>
           </a:p>
         </p:txBody>
       </p:sp>
@@ -16305,7 +15451,7 @@
 </file>
 
 <file path=ppt/slides/slide9.xml><?xml version="1.0" encoding="utf-8"?>
-<p:sld xmlns:a="http://schemas.openxmlformats.org/drawingml/2006/main" xmlns:p="http://schemas.openxmlformats.org/presentationml/2006/main" xmlns:r="http://schemas.openxmlformats.org/officeDocument/2006/relationships">
+<p:sld xmlns:a="http://schemas.openxmlformats.org/drawingml/2006/main" xmlns:r="http://schemas.openxmlformats.org/officeDocument/2006/relationships" xmlns:p="http://schemas.openxmlformats.org/presentationml/2006/main">
   <p:cSld>
     <p:spTree>
       <p:nvGrpSpPr>
@@ -16313,7 +15459,14 @@
         <p:cNvGrpSpPr/>
         <p:nvPr/>
       </p:nvGrpSpPr>
-      <p:grpSpPr/>
+      <p:grpSpPr>
+        <a:xfrm>
+          <a:off x="0" y="0"/>
+          <a:ext cx="0" cy="0"/>
+          <a:chOff x="0" y="0"/>
+          <a:chExt cx="0" cy="0"/>
+        </a:xfrm>
+      </p:grpSpPr>
       <p:sp>
         <p:nvSpPr>
           <p:cNvPr id="2" name="Rectangle 1"/>
@@ -16356,6 +15509,7 @@
           <a:lstStyle/>
           <a:p>
             <a:pPr algn="ctr"/>
+            <a:endParaRPr/>
           </a:p>
         </p:txBody>
       </p:sp>
@@ -16368,7 +15522,7 @@
           <p:nvPr/>
         </p:nvPicPr>
         <p:blipFill>
-          <a:blip r:embed="rId2"/>
+          <a:blip r:embed="rId3"/>
           <a:stretch>
             <a:fillRect/>
           </a:stretch>
@@ -16432,58 +15586,6 @@
             </a:pPr>
             <a:r>
               <a:t>Three-tier distributed architecture ensuring scalability, speed, and security</a:t>
-            </a:r>
-          </a:p>
-        </p:txBody>
-      </p:sp>
-      <p:sp>
-        <p:nvSpPr>
-          <p:cNvPr id="5" name="Rounded Rectangle 4"/>
-          <p:cNvSpPr/>
-          <p:nvPr/>
-        </p:nvSpPr>
-        <p:spPr>
-          <a:xfrm>
-            <a:off x="10241280" y="320040"/>
-            <a:ext cx="1280160" cy="384048"/>
-          </a:xfrm>
-          <a:prstGeom prst="roundRect">
-            <a:avLst/>
-          </a:prstGeom>
-          <a:solidFill>
-            <a:srgbClr val="EEF2FF"/>
-          </a:solidFill>
-          <a:ln>
-            <a:noFill/>
-          </a:ln>
-        </p:spPr>
-        <p:style>
-          <a:lnRef idx="1">
-            <a:schemeClr val="accent1"/>
-          </a:lnRef>
-          <a:fillRef idx="3">
-            <a:schemeClr val="accent1"/>
-          </a:fillRef>
-          <a:effectRef idx="2">
-            <a:schemeClr val="accent1"/>
-          </a:effectRef>
-          <a:fontRef idx="minor">
-            <a:schemeClr val="lt1"/>
-          </a:fontRef>
-        </p:style>
-        <p:txBody>
-          <a:bodyPr rtlCol="0" anchor="ctr"/>
-          <a:lstStyle/>
-          <a:p>
-            <a:pPr algn="ctr">
-              <a:defRPr sz="1000" b="1">
-                <a:solidFill>
-                  <a:srgbClr val="0052CC"/>
-                </a:solidFill>
-              </a:defRPr>
-            </a:pPr>
-            <a:r>
-              <a:t>Bete Defense</a:t>
             </a:r>
           </a:p>
         </p:txBody>
@@ -16530,6 +15632,7 @@
           <a:lstStyle/>
           <a:p>
             <a:pPr algn="ctr"/>
+            <a:endParaRPr/>
           </a:p>
         </p:txBody>
       </p:sp>
@@ -16685,6 +15788,7 @@
           <a:lstStyle/>
           <a:p>
             <a:pPr algn="ctr"/>
+            <a:endParaRPr/>
           </a:p>
         </p:txBody>
       </p:sp>
@@ -16840,6 +15944,7 @@
           <a:lstStyle/>
           <a:p>
             <a:pPr algn="ctr"/>
+            <a:endParaRPr/>
           </a:p>
         </p:txBody>
       </p:sp>
@@ -17292,44 +16397,44 @@
         <a:sysClr val="window" lastClr="FFFFFF"/>
       </a:lt1>
       <a:dk2>
-        <a:srgbClr val="1F497D"/>
+        <a:srgbClr val="0E2841"/>
       </a:dk2>
       <a:lt2>
-        <a:srgbClr val="EEECE1"/>
+        <a:srgbClr val="E8E8E8"/>
       </a:lt2>
       <a:accent1>
-        <a:srgbClr val="4F81BD"/>
+        <a:srgbClr val="156082"/>
       </a:accent1>
       <a:accent2>
-        <a:srgbClr val="C0504D"/>
+        <a:srgbClr val="E97132"/>
       </a:accent2>
       <a:accent3>
-        <a:srgbClr val="9BBB59"/>
+        <a:srgbClr val="196B24"/>
       </a:accent3>
       <a:accent4>
-        <a:srgbClr val="8064A2"/>
+        <a:srgbClr val="0F9ED5"/>
       </a:accent4>
       <a:accent5>
-        <a:srgbClr val="4BACC6"/>
+        <a:srgbClr val="A02B93"/>
       </a:accent5>
       <a:accent6>
-        <a:srgbClr val="F79646"/>
+        <a:srgbClr val="4EA72E"/>
       </a:accent6>
       <a:hlink>
-        <a:srgbClr val="0000FF"/>
+        <a:srgbClr val="467886"/>
       </a:hlink>
       <a:folHlink>
-        <a:srgbClr val="800080"/>
+        <a:srgbClr val="96607D"/>
       </a:folHlink>
     </a:clrScheme>
     <a:fontScheme name="Office">
       <a:majorFont>
-        <a:latin typeface="Calibri"/>
+        <a:latin typeface="Aptos Display" panose="02110004020202020204"/>
         <a:ea typeface=""/>
         <a:cs typeface=""/>
-        <a:font script="Jpan" typeface="ＭＳ Ｐゴシック"/>
+        <a:font script="Jpan" typeface="游ゴシック Light"/>
         <a:font script="Hang" typeface="맑은 고딕"/>
-        <a:font script="Hans" typeface="宋体"/>
+        <a:font script="Hans" typeface="等线 Light"/>
         <a:font script="Hant" typeface="新細明體"/>
         <a:font script="Arab" typeface="Times New Roman"/>
         <a:font script="Hebr" typeface="Times New Roman"/>
@@ -17357,14 +16462,31 @@
         <a:font script="Viet" typeface="Times New Roman"/>
         <a:font script="Uigh" typeface="Microsoft Uighur"/>
         <a:font script="Geor" typeface="Sylfaen"/>
+        <a:font script="Armn" typeface="Arial"/>
+        <a:font script="Bugi" typeface="Leelawadee UI"/>
+        <a:font script="Bopo" typeface="Microsoft JhengHei"/>
+        <a:font script="Java" typeface="Javanese Text"/>
+        <a:font script="Lisu" typeface="Segoe UI"/>
+        <a:font script="Mymr" typeface="Myanmar Text"/>
+        <a:font script="Nkoo" typeface="Ebrima"/>
+        <a:font script="Olck" typeface="Nirmala UI"/>
+        <a:font script="Osma" typeface="Ebrima"/>
+        <a:font script="Phag" typeface="Phagspa"/>
+        <a:font script="Syrn" typeface="Estrangelo Edessa"/>
+        <a:font script="Syrj" typeface="Estrangelo Edessa"/>
+        <a:font script="Syre" typeface="Estrangelo Edessa"/>
+        <a:font script="Sora" typeface="Nirmala UI"/>
+        <a:font script="Tale" typeface="Microsoft Tai Le"/>
+        <a:font script="Talu" typeface="Microsoft New Tai Lue"/>
+        <a:font script="Tfng" typeface="Ebrima"/>
       </a:majorFont>
       <a:minorFont>
-        <a:latin typeface="Calibri"/>
+        <a:latin typeface="Aptos" panose="02110004020202020204"/>
         <a:ea typeface=""/>
         <a:cs typeface=""/>
-        <a:font script="Jpan" typeface="ＭＳ Ｐゴシック"/>
+        <a:font script="Jpan" typeface="游ゴシック"/>
         <a:font script="Hang" typeface="맑은 고딕"/>
-        <a:font script="Hans" typeface="宋体"/>
+        <a:font script="Hans" typeface="等线"/>
         <a:font script="Hant" typeface="新細明體"/>
         <a:font script="Arab" typeface="Arial"/>
         <a:font script="Hebr" typeface="Arial"/>
@@ -17392,6 +16514,23 @@
         <a:font script="Viet" typeface="Arial"/>
         <a:font script="Uigh" typeface="Microsoft Uighur"/>
         <a:font script="Geor" typeface="Sylfaen"/>
+        <a:font script="Armn" typeface="Arial"/>
+        <a:font script="Bugi" typeface="Leelawadee UI"/>
+        <a:font script="Bopo" typeface="Microsoft JhengHei"/>
+        <a:font script="Java" typeface="Javanese Text"/>
+        <a:font script="Lisu" typeface="Segoe UI"/>
+        <a:font script="Mymr" typeface="Myanmar Text"/>
+        <a:font script="Nkoo" typeface="Ebrima"/>
+        <a:font script="Olck" typeface="Nirmala UI"/>
+        <a:font script="Osma" typeface="Ebrima"/>
+        <a:font script="Phag" typeface="Phagspa"/>
+        <a:font script="Syrn" typeface="Estrangelo Edessa"/>
+        <a:font script="Syrj" typeface="Estrangelo Edessa"/>
+        <a:font script="Syre" typeface="Estrangelo Edessa"/>
+        <a:font script="Sora" typeface="Nirmala UI"/>
+        <a:font script="Tale" typeface="Microsoft Tai Le"/>
+        <a:font script="Talu" typeface="Microsoft New Tai Lue"/>
+        <a:font script="Tfng" typeface="Ebrima"/>
       </a:minorFont>
     </a:fontScheme>
     <a:fmtScheme name="Office">
@@ -17403,180 +16542,136 @@
           <a:gsLst>
             <a:gs pos="0">
               <a:schemeClr val="phClr">
-                <a:tint val="50000"/>
-                <a:satMod val="300000"/>
+                <a:lumMod val="110000"/>
+                <a:satMod val="105000"/>
+                <a:tint val="67000"/>
               </a:schemeClr>
             </a:gs>
-            <a:gs pos="35000">
+            <a:gs pos="50000">
               <a:schemeClr val="phClr">
-                <a:tint val="37000"/>
-                <a:satMod val="300000"/>
+                <a:lumMod val="105000"/>
+                <a:satMod val="103000"/>
+                <a:tint val="73000"/>
               </a:schemeClr>
             </a:gs>
             <a:gs pos="100000">
               <a:schemeClr val="phClr">
-                <a:tint val="15000"/>
-                <a:satMod val="350000"/>
+                <a:lumMod val="105000"/>
+                <a:satMod val="109000"/>
+                <a:tint val="81000"/>
               </a:schemeClr>
             </a:gs>
           </a:gsLst>
-          <a:lin ang="16200000" scaled="1"/>
+          <a:lin ang="5400000" scaled="0"/>
         </a:gradFill>
         <a:gradFill rotWithShape="1">
           <a:gsLst>
             <a:gs pos="0">
               <a:schemeClr val="phClr">
-                <a:tint val="100000"/>
+                <a:satMod val="103000"/>
+                <a:lumMod val="102000"/>
+                <a:tint val="94000"/>
+              </a:schemeClr>
+            </a:gs>
+            <a:gs pos="50000">
+              <a:schemeClr val="phClr">
+                <a:satMod val="110000"/>
+                <a:lumMod val="100000"/>
                 <a:shade val="100000"/>
-                <a:satMod val="130000"/>
               </a:schemeClr>
             </a:gs>
             <a:gs pos="100000">
               <a:schemeClr val="phClr">
-                <a:tint val="50000"/>
-                <a:shade val="100000"/>
-                <a:satMod val="350000"/>
+                <a:lumMod val="99000"/>
+                <a:satMod val="120000"/>
+                <a:shade val="78000"/>
               </a:schemeClr>
             </a:gs>
           </a:gsLst>
-          <a:lin ang="16200000" scaled="0"/>
+          <a:lin ang="5400000" scaled="0"/>
         </a:gradFill>
       </a:fillStyleLst>
       <a:lnStyleLst>
-        <a:ln w="9525" cap="flat" cmpd="sng" algn="ctr">
+        <a:ln w="12700" cap="flat" cmpd="sng" algn="ctr">
           <a:solidFill>
-            <a:schemeClr val="phClr">
-              <a:shade val="95000"/>
-              <a:satMod val="105000"/>
-            </a:schemeClr>
+            <a:schemeClr val="phClr"/>
           </a:solidFill>
           <a:prstDash val="solid"/>
+          <a:miter lim="800000"/>
+        </a:ln>
+        <a:ln w="19050" cap="flat" cmpd="sng" algn="ctr">
+          <a:solidFill>
+            <a:schemeClr val="phClr"/>
+          </a:solidFill>
+          <a:prstDash val="solid"/>
+          <a:miter lim="800000"/>
         </a:ln>
         <a:ln w="25400" cap="flat" cmpd="sng" algn="ctr">
           <a:solidFill>
             <a:schemeClr val="phClr"/>
           </a:solidFill>
           <a:prstDash val="solid"/>
-        </a:ln>
-        <a:ln w="38100" cap="flat" cmpd="sng" algn="ctr">
-          <a:solidFill>
-            <a:schemeClr val="phClr"/>
-          </a:solidFill>
-          <a:prstDash val="solid"/>
+          <a:miter lim="800000"/>
         </a:ln>
       </a:lnStyleLst>
       <a:effectStyleLst>
         <a:effectStyle>
+          <a:effectLst/>
+        </a:effectStyle>
+        <a:effectStyle>
+          <a:effectLst/>
+        </a:effectStyle>
+        <a:effectStyle>
           <a:effectLst>
-            <a:outerShdw blurRad="40000" dist="20000" dir="5400000" rotWithShape="0">
+            <a:outerShdw blurRad="57150" dist="19050" dir="5400000" algn="ctr" rotWithShape="0">
               <a:srgbClr val="000000">
-                <a:alpha val="38000"/>
+                <a:alpha val="63000"/>
               </a:srgbClr>
             </a:outerShdw>
           </a:effectLst>
-        </a:effectStyle>
-        <a:effectStyle>
-          <a:effectLst>
-            <a:outerShdw blurRad="40000" dist="23000" dir="5400000" rotWithShape="0">
-              <a:srgbClr val="000000">
-                <a:alpha val="35000"/>
-              </a:srgbClr>
-            </a:outerShdw>
-          </a:effectLst>
-        </a:effectStyle>
-        <a:effectStyle>
-          <a:effectLst>
-            <a:outerShdw blurRad="40000" dist="23000" dir="5400000" rotWithShape="0">
-              <a:srgbClr val="000000">
-                <a:alpha val="35000"/>
-              </a:srgbClr>
-            </a:outerShdw>
-          </a:effectLst>
-          <a:scene3d>
-            <a:camera prst="orthographicFront">
-              <a:rot lat="0" lon="0" rev="0"/>
-            </a:camera>
-            <a:lightRig rig="threePt" dir="t">
-              <a:rot lat="0" lon="0" rev="1200000"/>
-            </a:lightRig>
-          </a:scene3d>
-          <a:sp3d>
-            <a:bevelT w="63500" h="25400"/>
-          </a:sp3d>
         </a:effectStyle>
       </a:effectStyleLst>
       <a:bgFillStyleLst>
         <a:solidFill>
           <a:schemeClr val="phClr"/>
         </a:solidFill>
+        <a:solidFill>
+          <a:schemeClr val="phClr">
+            <a:tint val="95000"/>
+            <a:satMod val="170000"/>
+          </a:schemeClr>
+        </a:solidFill>
         <a:gradFill rotWithShape="1">
           <a:gsLst>
             <a:gs pos="0">
               <a:schemeClr val="phClr">
-                <a:tint val="40000"/>
-                <a:satMod val="350000"/>
+                <a:tint val="93000"/>
+                <a:satMod val="150000"/>
+                <a:shade val="98000"/>
+                <a:lumMod val="102000"/>
               </a:schemeClr>
             </a:gs>
-            <a:gs pos="40000">
+            <a:gs pos="50000">
               <a:schemeClr val="phClr">
-                <a:tint val="45000"/>
-                <a:shade val="99000"/>
-                <a:satMod val="350000"/>
+                <a:tint val="98000"/>
+                <a:satMod val="130000"/>
+                <a:shade val="90000"/>
+                <a:lumMod val="103000"/>
               </a:schemeClr>
             </a:gs>
             <a:gs pos="100000">
               <a:schemeClr val="phClr">
-                <a:shade val="20000"/>
-                <a:satMod val="255000"/>
+                <a:shade val="63000"/>
+                <a:satMod val="120000"/>
               </a:schemeClr>
             </a:gs>
           </a:gsLst>
-          <a:path path="circle">
-            <a:fillToRect l="50000" t="-80000" r="50000" b="180000"/>
-          </a:path>
-        </a:gradFill>
-        <a:gradFill rotWithShape="1">
-          <a:gsLst>
-            <a:gs pos="0">
-              <a:schemeClr val="phClr">
-                <a:tint val="80000"/>
-                <a:satMod val="300000"/>
-              </a:schemeClr>
-            </a:gs>
-            <a:gs pos="100000">
-              <a:schemeClr val="phClr">
-                <a:shade val="30000"/>
-                <a:satMod val="200000"/>
-              </a:schemeClr>
-            </a:gs>
-          </a:gsLst>
-          <a:path path="circle">
-            <a:fillToRect l="50000" t="50000" r="50000" b="50000"/>
-          </a:path>
+          <a:lin ang="5400000" scaled="0"/>
         </a:gradFill>
       </a:bgFillStyleLst>
     </a:fmtScheme>
   </a:themeElements>
   <a:objectDefaults>
-    <a:spDef>
-      <a:spPr/>
-      <a:bodyPr/>
-      <a:lstStyle/>
-      <a:style>
-        <a:lnRef idx="1">
-          <a:schemeClr val="accent1"/>
-        </a:lnRef>
-        <a:fillRef idx="3">
-          <a:schemeClr val="accent1"/>
-        </a:fillRef>
-        <a:effectRef idx="2">
-          <a:schemeClr val="accent1"/>
-        </a:effectRef>
-        <a:fontRef idx="minor">
-          <a:schemeClr val="lt1"/>
-        </a:fontRef>
-      </a:style>
-    </a:spDef>
     <a:lnDef>
       <a:spPr/>
       <a:bodyPr/>
@@ -17598,5 +16693,10 @@
     </a:lnDef>
   </a:objectDefaults>
   <a:extraClrSchemeLst/>
+  <a:extLst>
+    <a:ext uri="{05A4C25C-085E-4340-85A3-A5531E510DB2}">
+      <thm15:themeFamily xmlns:thm15="http://schemas.microsoft.com/office/thememl/2012/main" name="Office Theme" id="{2E142A2C-CD16-42D6-873A-C26D2A0506FA}" vid="{1BDDFF52-6CD6-40A5-AB3C-68EB2F1E4D0A}"/>
+    </a:ext>
+  </a:extLst>
 </a:theme>
 </file>